--- a/materials/lectures/11-bfs-pt_I/slides.pptx
+++ b/materials/lectures/11-bfs-pt_I/slides.pptx
@@ -7,7 +7,7 @@
     <p:sldMasterId id="2147483668" r:id="rId3"/>
   </p:sldMasterIdLst>
   <p:notesMasterIdLst>
-    <p:notesMasterId r:id="rId27"/>
+    <p:notesMasterId r:id="rId35"/>
   </p:notesMasterIdLst>
   <p:sldIdLst>
     <p:sldId id="256" r:id="rId4"/>
@@ -18,69 +18,65 @@
     <p:sldId id="779" r:id="rId9"/>
     <p:sldId id="815" r:id="rId10"/>
     <p:sldId id="816" r:id="rId11"/>
-    <p:sldId id="829" r:id="rId12"/>
-    <p:sldId id="830" r:id="rId13"/>
-    <p:sldId id="817" r:id="rId14"/>
-    <p:sldId id="818" r:id="rId15"/>
-    <p:sldId id="820" r:id="rId16"/>
-    <p:sldId id="821" r:id="rId17"/>
-    <p:sldId id="819" r:id="rId18"/>
-    <p:sldId id="822" r:id="rId19"/>
-    <p:sldId id="824" r:id="rId20"/>
-    <p:sldId id="823" r:id="rId21"/>
-    <p:sldId id="826" r:id="rId22"/>
-    <p:sldId id="825" r:id="rId23"/>
-    <p:sldId id="831" r:id="rId24"/>
-    <p:sldId id="827" r:id="rId25"/>
-    <p:sldId id="811" r:id="rId26"/>
+    <p:sldId id="832" r:id="rId12"/>
+    <p:sldId id="833" r:id="rId13"/>
+    <p:sldId id="829" r:id="rId14"/>
+    <p:sldId id="830" r:id="rId15"/>
+    <p:sldId id="834" r:id="rId16"/>
+    <p:sldId id="817" r:id="rId17"/>
+    <p:sldId id="818" r:id="rId18"/>
+    <p:sldId id="835" r:id="rId19"/>
+    <p:sldId id="820" r:id="rId20"/>
+    <p:sldId id="821" r:id="rId21"/>
+    <p:sldId id="836" r:id="rId22"/>
+    <p:sldId id="819" r:id="rId23"/>
+    <p:sldId id="822" r:id="rId24"/>
+    <p:sldId id="824" r:id="rId25"/>
+    <p:sldId id="823" r:id="rId26"/>
+    <p:sldId id="826" r:id="rId27"/>
+    <p:sldId id="825" r:id="rId28"/>
+    <p:sldId id="837" r:id="rId29"/>
+    <p:sldId id="838" r:id="rId30"/>
+    <p:sldId id="831" r:id="rId31"/>
+    <p:sldId id="839" r:id="rId32"/>
+    <p:sldId id="827" r:id="rId33"/>
+    <p:sldId id="811" r:id="rId34"/>
   </p:sldIdLst>
   <p:sldSz cx="12192000" cy="6858000"/>
   <p:notesSz cx="6858000" cy="9144000"/>
   <p:embeddedFontLst>
     <p:embeddedFont>
       <p:font typeface="Bookman Old Style" panose="02050604050505020204" pitchFamily="18" charset="0"/>
-      <p:regular r:id="rId28"/>
-      <p:bold r:id="rId29"/>
-      <p:italic r:id="rId30"/>
-      <p:boldItalic r:id="rId31"/>
-    </p:embeddedFont>
-    <p:embeddedFont>
-      <p:font typeface="Calibri" panose="020F0502020204030204" pitchFamily="34" charset="0"/>
-      <p:regular r:id="rId32"/>
-      <p:bold r:id="rId33"/>
-      <p:italic r:id="rId34"/>
-      <p:boldItalic r:id="rId35"/>
-    </p:embeddedFont>
-    <p:embeddedFont>
-      <p:font typeface="Calibri Light" panose="020F0302020204030204" pitchFamily="34" charset="0"/>
       <p:regular r:id="rId36"/>
-      <p:italic r:id="rId37"/>
+      <p:bold r:id="rId37"/>
+      <p:italic r:id="rId38"/>
+      <p:boldItalic r:id="rId39"/>
     </p:embeddedFont>
     <p:embeddedFont>
       <p:font typeface="Cambria Math" panose="02040503050406030204" pitchFamily="18" charset="0"/>
-      <p:regular r:id="rId38"/>
+      <p:regular r:id="rId40"/>
     </p:embeddedFont>
     <p:embeddedFont>
       <p:font typeface="Gill Sans MT" panose="020B0502020104020203" pitchFamily="34" charset="0"/>
-      <p:regular r:id="rId39"/>
-      <p:bold r:id="rId40"/>
-      <p:italic r:id="rId41"/>
-      <p:boldItalic r:id="rId42"/>
+      <p:regular r:id="rId41"/>
+      <p:bold r:id="rId42"/>
+      <p:italic r:id="rId43"/>
+      <p:boldItalic r:id="rId44"/>
     </p:embeddedFont>
     <p:embeddedFont>
       <p:font typeface="Times" panose="02020603050405020304" pitchFamily="18" charset="0"/>
-      <p:regular r:id="rId43"/>
-      <p:bold r:id="rId44"/>
-      <p:italic r:id="rId45"/>
-      <p:boldItalic r:id="rId46"/>
+      <p:regular r:id="rId45"/>
+      <p:bold r:id="rId46"/>
+      <p:italic r:id="rId47"/>
+      <p:boldItalic r:id="rId48"/>
     </p:embeddedFont>
     <p:embeddedFont>
       <p:font typeface="Wingdings 3" panose="05040102010807070707" pitchFamily="18" charset="2"/>
-      <p:regular r:id="rId47"/>
+      <p:regular r:id="rId49"/>
     </p:embeddedFont>
   </p:embeddedFontLst>
   <p:custDataLst>
-    <p:tags r:id="rId48"/>
+    <p:tags r:id="rId50"/>
   </p:custDataLst>
   <p:defaultTextStyle>
     <a:defPPr>
@@ -413,7 +409,7 @@
               <a:pPr>
                 <a:defRPr/>
               </a:pPr>
-              <a:t>2/12/2023</a:t>
+              <a:t>2/8/2025</a:t>
             </a:fld>
             <a:endParaRPr lang="en-US"/>
           </a:p>
@@ -1101,7 +1097,7 @@
               <a:pPr>
                 <a:defRPr/>
               </a:pPr>
-              <a:t>2/12/2023</a:t>
+              <a:t>2/8/2025</a:t>
             </a:fld>
             <a:endParaRPr lang="en-US"/>
           </a:p>
@@ -1345,7 +1341,7 @@
           <a:p>
             <a:fld id="{344494C4-6097-4BA9-B81C-8FE8D10E85BA}" type="datetimeFigureOut">
               <a:rPr lang="en-US" smtClean="0"/>
-              <a:t>2/12/2023</a:t>
+              <a:t>2/8/2025</a:t>
             </a:fld>
             <a:endParaRPr lang="en-US"/>
           </a:p>
@@ -1590,7 +1586,7 @@
           <a:p>
             <a:fld id="{344494C4-6097-4BA9-B81C-8FE8D10E85BA}" type="datetimeFigureOut">
               <a:rPr lang="en-US" smtClean="0"/>
-              <a:t>2/12/2023</a:t>
+              <a:t>2/8/2025</a:t>
             </a:fld>
             <a:endParaRPr lang="en-US"/>
           </a:p>
@@ -1970,7 +1966,7 @@
           <a:p>
             <a:fld id="{344494C4-6097-4BA9-B81C-8FE8D10E85BA}" type="datetimeFigureOut">
               <a:rPr lang="en-US" smtClean="0"/>
-              <a:t>2/12/2023</a:t>
+              <a:t>2/8/2025</a:t>
             </a:fld>
             <a:endParaRPr lang="en-US"/>
           </a:p>
@@ -2103,7 +2099,7 @@
           <a:p>
             <a:fld id="{344494C4-6097-4BA9-B81C-8FE8D10E85BA}" type="datetimeFigureOut">
               <a:rPr lang="en-US" smtClean="0"/>
-              <a:t>2/12/2023</a:t>
+              <a:t>2/8/2025</a:t>
             </a:fld>
             <a:endParaRPr lang="en-US"/>
           </a:p>
@@ -2214,7 +2210,7 @@
           <a:p>
             <a:fld id="{344494C4-6097-4BA9-B81C-8FE8D10E85BA}" type="datetimeFigureOut">
               <a:rPr lang="en-US" smtClean="0"/>
-              <a:t>2/12/2023</a:t>
+              <a:t>2/8/2025</a:t>
             </a:fld>
             <a:endParaRPr lang="en-US"/>
           </a:p>
@@ -2505,7 +2501,7 @@
           <a:p>
             <a:fld id="{344494C4-6097-4BA9-B81C-8FE8D10E85BA}" type="datetimeFigureOut">
               <a:rPr lang="en-US" smtClean="0"/>
-              <a:t>2/12/2023</a:t>
+              <a:t>2/8/2025</a:t>
             </a:fld>
             <a:endParaRPr lang="en-US"/>
           </a:p>
@@ -2773,7 +2769,7 @@
           <a:p>
             <a:fld id="{344494C4-6097-4BA9-B81C-8FE8D10E85BA}" type="datetimeFigureOut">
               <a:rPr lang="en-US" smtClean="0"/>
-              <a:t>2/12/2023</a:t>
+              <a:t>2/8/2025</a:t>
             </a:fld>
             <a:endParaRPr lang="en-US"/>
           </a:p>
@@ -2957,7 +2953,7 @@
           <a:p>
             <a:fld id="{344494C4-6097-4BA9-B81C-8FE8D10E85BA}" type="datetimeFigureOut">
               <a:rPr lang="en-US" smtClean="0"/>
-              <a:t>2/12/2023</a:t>
+              <a:t>2/8/2025</a:t>
             </a:fld>
             <a:endParaRPr lang="en-US"/>
           </a:p>
@@ -3151,7 +3147,7 @@
           <a:p>
             <a:fld id="{344494C4-6097-4BA9-B81C-8FE8D10E85BA}" type="datetimeFigureOut">
               <a:rPr lang="en-US" smtClean="0"/>
-              <a:t>2/12/2023</a:t>
+              <a:t>2/8/2025</a:t>
             </a:fld>
             <a:endParaRPr lang="en-US"/>
           </a:p>
@@ -3349,7 +3345,7 @@
           <a:p>
             <a:fld id="{7BF7D500-1223-4445-9EB2-2C72C770F9EB}" type="datetimeFigureOut">
               <a:rPr lang="en-US" smtClean="0"/>
-              <a:t>2/12/2023</a:t>
+              <a:t>2/8/2025</a:t>
             </a:fld>
             <a:endParaRPr lang="en-US"/>
           </a:p>
@@ -3532,7 +3528,7 @@
               <a:pPr>
                 <a:defRPr/>
               </a:pPr>
-              <a:t>2/12/2023</a:t>
+              <a:t>2/8/2025</a:t>
             </a:fld>
             <a:endParaRPr lang="en-US"/>
           </a:p>
@@ -3686,7 +3682,7 @@
           <a:p>
             <a:fld id="{7BF7D500-1223-4445-9EB2-2C72C770F9EB}" type="datetimeFigureOut">
               <a:rPr lang="en-US" smtClean="0"/>
-              <a:t>2/12/2023</a:t>
+              <a:t>2/8/2025</a:t>
             </a:fld>
             <a:endParaRPr lang="en-US"/>
           </a:p>
@@ -3931,7 +3927,7 @@
           <a:p>
             <a:fld id="{7BF7D500-1223-4445-9EB2-2C72C770F9EB}" type="datetimeFigureOut">
               <a:rPr lang="en-US" smtClean="0"/>
-              <a:t>2/12/2023</a:t>
+              <a:t>2/8/2025</a:t>
             </a:fld>
             <a:endParaRPr lang="en-US"/>
           </a:p>
@@ -4160,7 +4156,7 @@
           <a:p>
             <a:fld id="{7BF7D500-1223-4445-9EB2-2C72C770F9EB}" type="datetimeFigureOut">
               <a:rPr lang="en-US" smtClean="0"/>
-              <a:t>2/12/2023</a:t>
+              <a:t>2/8/2025</a:t>
             </a:fld>
             <a:endParaRPr lang="en-US"/>
           </a:p>
@@ -4524,7 +4520,7 @@
           <a:p>
             <a:fld id="{7BF7D500-1223-4445-9EB2-2C72C770F9EB}" type="datetimeFigureOut">
               <a:rPr lang="en-US" smtClean="0"/>
-              <a:t>2/12/2023</a:t>
+              <a:t>2/8/2025</a:t>
             </a:fld>
             <a:endParaRPr lang="en-US"/>
           </a:p>
@@ -4641,7 +4637,7 @@
           <a:p>
             <a:fld id="{7BF7D500-1223-4445-9EB2-2C72C770F9EB}" type="datetimeFigureOut">
               <a:rPr lang="en-US" smtClean="0"/>
-              <a:t>2/12/2023</a:t>
+              <a:t>2/8/2025</a:t>
             </a:fld>
             <a:endParaRPr lang="en-US"/>
           </a:p>
@@ -4736,7 +4732,7 @@
           <a:p>
             <a:fld id="{7BF7D500-1223-4445-9EB2-2C72C770F9EB}" type="datetimeFigureOut">
               <a:rPr lang="en-US" smtClean="0"/>
-              <a:t>2/12/2023</a:t>
+              <a:t>2/8/2025</a:t>
             </a:fld>
             <a:endParaRPr lang="en-US"/>
           </a:p>
@@ -5011,7 +5007,7 @@
           <a:p>
             <a:fld id="{7BF7D500-1223-4445-9EB2-2C72C770F9EB}" type="datetimeFigureOut">
               <a:rPr lang="en-US" smtClean="0"/>
-              <a:t>2/12/2023</a:t>
+              <a:t>2/8/2025</a:t>
             </a:fld>
             <a:endParaRPr lang="en-US"/>
           </a:p>
@@ -5263,7 +5259,7 @@
           <a:p>
             <a:fld id="{7BF7D500-1223-4445-9EB2-2C72C770F9EB}" type="datetimeFigureOut">
               <a:rPr lang="en-US" smtClean="0"/>
-              <a:t>2/12/2023</a:t>
+              <a:t>2/8/2025</a:t>
             </a:fld>
             <a:endParaRPr lang="en-US"/>
           </a:p>
@@ -5431,7 +5427,7 @@
           <a:p>
             <a:fld id="{7BF7D500-1223-4445-9EB2-2C72C770F9EB}" type="datetimeFigureOut">
               <a:rPr lang="en-US" smtClean="0"/>
-              <a:t>2/12/2023</a:t>
+              <a:t>2/8/2025</a:t>
             </a:fld>
             <a:endParaRPr lang="en-US"/>
           </a:p>
@@ -5609,7 +5605,7 @@
           <a:p>
             <a:fld id="{7BF7D500-1223-4445-9EB2-2C72C770F9EB}" type="datetimeFigureOut">
               <a:rPr lang="en-US" smtClean="0"/>
-              <a:t>2/12/2023</a:t>
+              <a:t>2/8/2025</a:t>
             </a:fld>
             <a:endParaRPr lang="en-US"/>
           </a:p>
@@ -5853,7 +5849,7 @@
               <a:pPr>
                 <a:defRPr/>
               </a:pPr>
-              <a:t>2/12/2023</a:t>
+              <a:t>2/8/2025</a:t>
             </a:fld>
             <a:endParaRPr lang="en-US"/>
           </a:p>
@@ -6203,7 +6199,7 @@
               <a:pPr>
                 <a:defRPr/>
               </a:pPr>
-              <a:t>2/12/2023</a:t>
+              <a:t>2/8/2025</a:t>
             </a:fld>
             <a:endParaRPr lang="en-US"/>
           </a:p>
@@ -6367,7 +6363,7 @@
               <a:pPr>
                 <a:defRPr/>
               </a:pPr>
-              <a:t>2/12/2023</a:t>
+              <a:t>2/8/2025</a:t>
             </a:fld>
             <a:endParaRPr lang="en-US"/>
           </a:p>
@@ -6458,7 +6454,7 @@
               <a:pPr>
                 <a:defRPr/>
               </a:pPr>
-              <a:t>2/12/2023</a:t>
+              <a:t>2/8/2025</a:t>
             </a:fld>
             <a:endParaRPr lang="en-US"/>
           </a:p>
@@ -6567,7 +6563,7 @@
               <a:pPr>
                 <a:defRPr/>
               </a:pPr>
-              <a:t>2/12/2023</a:t>
+              <a:t>2/8/2025</a:t>
             </a:fld>
             <a:endParaRPr lang="en-US"/>
           </a:p>
@@ -6752,7 +6748,7 @@
           <a:p>
             <a:fld id="{344494C4-6097-4BA9-B81C-8FE8D10E85BA}" type="datetimeFigureOut">
               <a:rPr lang="en-US" smtClean="0"/>
-              <a:t>2/12/2023</a:t>
+              <a:t>2/8/2025</a:t>
             </a:fld>
             <a:endParaRPr lang="en-US"/>
           </a:p>
@@ -6936,7 +6932,7 @@
           <a:p>
             <a:fld id="{344494C4-6097-4BA9-B81C-8FE8D10E85BA}" type="datetimeFigureOut">
               <a:rPr lang="en-US" smtClean="0"/>
-              <a:t>2/12/2023</a:t>
+              <a:t>2/8/2025</a:t>
             </a:fld>
             <a:endParaRPr lang="en-US"/>
           </a:p>
@@ -7185,7 +7181,7 @@
               <a:pPr>
                 <a:defRPr/>
               </a:pPr>
-              <a:t>2/12/2023</a:t>
+              <a:t>2/8/2025</a:t>
             </a:fld>
             <a:endParaRPr lang="en-US"/>
           </a:p>
@@ -8439,7 +8435,7 @@
           <a:p>
             <a:fld id="{7BF7D500-1223-4445-9EB2-2C72C770F9EB}" type="datetimeFigureOut">
               <a:rPr lang="en-US" smtClean="0"/>
-              <a:t>2/12/2023</a:t>
+              <a:t>2/8/2025</a:t>
             </a:fld>
             <a:endParaRPr lang="en-US"/>
           </a:p>
@@ -9063,6 +9059,621 @@
   <p:cSld>
     <p:spTree>
       <p:nvGrpSpPr>
+        <p:cNvPr id="1" name="">
+          <a:extLst>
+            <a:ext uri="{FF2B5EF4-FFF2-40B4-BE49-F238E27FC236}">
+              <a16:creationId xmlns:a16="http://schemas.microsoft.com/office/drawing/2014/main" id="{308B2E08-8CC8-630E-6339-DF931EAD3014}"/>
+            </a:ext>
+          </a:extLst>
+        </p:cNvPr>
+        <p:cNvGrpSpPr/>
+        <p:nvPr/>
+      </p:nvGrpSpPr>
+      <p:grpSpPr>
+        <a:xfrm>
+          <a:off x="0" y="0"/>
+          <a:ext cx="0" cy="0"/>
+          <a:chOff x="0" y="0"/>
+          <a:chExt cx="0" cy="0"/>
+        </a:xfrm>
+      </p:grpSpPr>
+      <p:sp>
+        <p:nvSpPr>
+          <p:cNvPr id="2" name="Title 1">
+            <a:extLst>
+              <a:ext uri="{FF2B5EF4-FFF2-40B4-BE49-F238E27FC236}">
+                <a16:creationId xmlns:a16="http://schemas.microsoft.com/office/drawing/2014/main" id="{12B9DF32-591B-9375-DF5B-8C3DC859DAE0}"/>
+              </a:ext>
+            </a:extLst>
+          </p:cNvPr>
+          <p:cNvSpPr>
+            <a:spLocks noGrp="1"/>
+          </p:cNvSpPr>
+          <p:nvPr>
+            <p:ph type="title"/>
+          </p:nvPr>
+        </p:nvSpPr>
+        <p:spPr/>
+        <p:txBody>
+          <a:bodyPr/>
+          <a:lstStyle/>
+          <a:p>
+            <a:r>
+              <a:rPr lang="en-US" dirty="0"/>
+              <a:t>How to implement the idea? </a:t>
+            </a:r>
+          </a:p>
+        </p:txBody>
+      </p:sp>
+      <mc:AlternateContent xmlns:mc="http://schemas.openxmlformats.org/markup-compatibility/2006">
+        <mc:Choice xmlns:a14="http://schemas.microsoft.com/office/drawing/2010/main" Requires="a14">
+          <p:sp>
+            <p:nvSpPr>
+              <p:cNvPr id="3" name="Content Placeholder 2">
+                <a:extLst>
+                  <a:ext uri="{FF2B5EF4-FFF2-40B4-BE49-F238E27FC236}">
+                    <a16:creationId xmlns:a16="http://schemas.microsoft.com/office/drawing/2014/main" id="{9E3FBD06-2D51-6284-AEC8-6303CA73B5A4}"/>
+                  </a:ext>
+                </a:extLst>
+              </p:cNvPr>
+              <p:cNvSpPr>
+                <a:spLocks noGrp="1"/>
+              </p:cNvSpPr>
+              <p:nvPr>
+                <p:ph sz="quarter" idx="1"/>
+              </p:nvPr>
+            </p:nvSpPr>
+            <p:spPr/>
+            <p:txBody>
+              <a:bodyPr/>
+              <a:lstStyle/>
+              <a:p>
+                <a:r>
+                  <a:rPr lang="en-US" sz="2400" dirty="0"/>
+                  <a:t>Recall: the key to BFS is at any moment, it will choose </a:t>
+                </a:r>
+                <a:r>
+                  <a:rPr lang="en-US" sz="2400" dirty="0">
+                    <a:solidFill>
+                      <a:srgbClr val="700000"/>
+                    </a:solidFill>
+                  </a:rPr>
+                  <a:t>the oldest pending node </a:t>
+                </a:r>
+                <a:r>
+                  <a:rPr lang="en-US" sz="2400" dirty="0"/>
+                  <a:t>to explore</a:t>
+                </a:r>
+              </a:p>
+              <a:p>
+                <a:endParaRPr lang="en-US" sz="1600" dirty="0"/>
+              </a:p>
+              <a:p>
+                <a:r>
+                  <a:rPr lang="en-US" sz="2400" dirty="0"/>
+                  <a:t>Need to maintain pending nodes: </a:t>
+                </a:r>
+              </a:p>
+              <a:p>
+                <a:pPr lvl="1"/>
+                <a:r>
+                  <a:rPr lang="en-US" sz="2000" dirty="0"/>
+                  <a:t>Need a </a:t>
+                </a:r>
+                <a:r>
+                  <a:rPr lang="en-US" sz="2000" dirty="0">
+                    <a:solidFill>
+                      <a:srgbClr val="C00000"/>
+                    </a:solidFill>
+                  </a:rPr>
+                  <a:t>FIFO</a:t>
+                </a:r>
+                <a:r>
+                  <a:rPr lang="en-US" sz="2000" dirty="0"/>
+                  <a:t> (first-in first-out) data structure, which is a standard `</a:t>
+                </a:r>
+                <a:r>
+                  <a:rPr lang="en-US" sz="2000" dirty="0">
+                    <a:solidFill>
+                      <a:srgbClr val="C00000"/>
+                    </a:solidFill>
+                  </a:rPr>
+                  <a:t>queue</a:t>
+                </a:r>
+                <a:r>
+                  <a:rPr lang="en-US" sz="2000" dirty="0"/>
+                  <a:t>’ data structure </a:t>
+                </a:r>
+              </a:p>
+              <a:p>
+                <a:pPr lvl="2"/>
+                <a:r>
+                  <a:rPr lang="en-US" sz="1800" dirty="0"/>
+                  <a:t>A queue data structure can support the following in </a:t>
+                </a:r>
+                <a14:m>
+                  <m:oMath xmlns:m="http://schemas.openxmlformats.org/officeDocument/2006/math">
+                    <m:r>
+                      <m:rPr>
+                        <m:sty m:val="p"/>
+                      </m:rPr>
+                      <a:rPr lang="en-US" sz="1800">
+                        <a:latin typeface="Cambria Math" panose="02040503050406030204" pitchFamily="18" charset="0"/>
+                      </a:rPr>
+                      <m:t>Θ</m:t>
+                    </m:r>
+                    <m:d>
+                      <m:dPr>
+                        <m:ctrlPr>
+                          <a:rPr lang="en-US" sz="1800" i="1">
+                            <a:latin typeface="Cambria Math" panose="02040503050406030204" pitchFamily="18" charset="0"/>
+                          </a:rPr>
+                        </m:ctrlPr>
+                      </m:dPr>
+                      <m:e>
+                        <m:r>
+                          <a:rPr lang="en-US" sz="1800" i="1">
+                            <a:latin typeface="Cambria Math" panose="02040503050406030204" pitchFamily="18" charset="0"/>
+                          </a:rPr>
+                          <m:t>1</m:t>
+                        </m:r>
+                      </m:e>
+                    </m:d>
+                  </m:oMath>
+                </a14:m>
+                <a:r>
+                  <a:rPr lang="en-US" sz="1800" dirty="0"/>
+                  <a:t> time: </a:t>
+                </a:r>
+              </a:p>
+              <a:p>
+                <a:pPr lvl="2"/>
+                <a:r>
+                  <a:rPr lang="en-US" sz="1800" dirty="0" err="1"/>
+                  <a:t>Q.Enqueue</a:t>
+                </a:r>
+                <a:r>
+                  <a:rPr lang="en-US" sz="1800" dirty="0"/>
+                  <a:t>(</a:t>
+                </a:r>
+                <a14:m>
+                  <m:oMath xmlns:m="http://schemas.openxmlformats.org/officeDocument/2006/math">
+                    <m:r>
+                      <a:rPr lang="en-US" sz="1800" i="1" dirty="0">
+                        <a:latin typeface="Cambria Math" panose="02040503050406030204" pitchFamily="18" charset="0"/>
+                      </a:rPr>
+                      <m:t>𝑎</m:t>
+                    </m:r>
+                  </m:oMath>
+                </a14:m>
+                <a:r>
+                  <a:rPr lang="en-US" sz="1800" dirty="0"/>
+                  <a:t>):  it adds a new element to the end of the current queue</a:t>
+                </a:r>
+              </a:p>
+              <a:p>
+                <a:pPr lvl="2"/>
+                <a14:m>
+                  <m:oMath xmlns:m="http://schemas.openxmlformats.org/officeDocument/2006/math">
+                    <m:r>
+                      <a:rPr lang="en-US" sz="1800" i="1" dirty="0">
+                        <a:latin typeface="Cambria Math" panose="02040503050406030204" pitchFamily="18" charset="0"/>
+                      </a:rPr>
+                      <m:t>𝑏</m:t>
+                    </m:r>
+                  </m:oMath>
+                </a14:m>
+                <a:r>
+                  <a:rPr lang="en-US" sz="1800" dirty="0"/>
+                  <a:t> = </a:t>
+                </a:r>
+                <a:r>
+                  <a:rPr lang="en-US" sz="1800" dirty="0" err="1"/>
+                  <a:t>Q.Dequeue</a:t>
+                </a:r>
+                <a:r>
+                  <a:rPr lang="en-US" sz="1800" dirty="0"/>
+                  <a:t>(): it returns the element b at the beginning of the current queue. </a:t>
+                </a:r>
+              </a:p>
+              <a:p>
+                <a:pPr lvl="2"/>
+                <a:endParaRPr lang="en-US" sz="1800" dirty="0"/>
+              </a:p>
+              <a:p>
+                <a:r>
+                  <a:rPr lang="en-US" sz="2400" dirty="0"/>
+                  <a:t>Need to maintain status: </a:t>
+                </a:r>
+              </a:p>
+              <a:p>
+                <a:pPr lvl="1"/>
+                <a:r>
+                  <a:rPr lang="en-US" sz="2000" dirty="0"/>
+                  <a:t>we can use an array to store status if all nodes are indexed from </a:t>
+                </a:r>
+                <a14:m>
+                  <m:oMath xmlns:m="http://schemas.openxmlformats.org/officeDocument/2006/math">
+                    <m:r>
+                      <a:rPr lang="en-US" sz="2000" i="1" dirty="0">
+                        <a:latin typeface="Cambria Math" panose="02040503050406030204" pitchFamily="18" charset="0"/>
+                      </a:rPr>
+                      <m:t>0</m:t>
+                    </m:r>
+                  </m:oMath>
+                </a14:m>
+                <a:r>
+                  <a:rPr lang="en-US" sz="2000" dirty="0"/>
+                  <a:t> to </a:t>
+                </a:r>
+                <a14:m>
+                  <m:oMath xmlns:m="http://schemas.openxmlformats.org/officeDocument/2006/math">
+                    <m:r>
+                      <a:rPr lang="en-US" sz="2000" i="1" dirty="0">
+                        <a:latin typeface="Cambria Math" panose="02040503050406030204" pitchFamily="18" charset="0"/>
+                      </a:rPr>
+                      <m:t>𝑛</m:t>
+                    </m:r>
+                    <m:r>
+                      <a:rPr lang="en-US" sz="2000" i="1" dirty="0">
+                        <a:latin typeface="Cambria Math" panose="02040503050406030204" pitchFamily="18" charset="0"/>
+                      </a:rPr>
+                      <m:t>−1</m:t>
+                    </m:r>
+                  </m:oMath>
+                </a14:m>
+                <a:r>
+                  <a:rPr lang="en-US" sz="2000" dirty="0"/>
+                  <a:t> </a:t>
+                </a:r>
+              </a:p>
+              <a:p>
+                <a:pPr lvl="1"/>
+                <a:r>
+                  <a:rPr lang="en-US" sz="2000" dirty="0"/>
+                  <a:t>or we can use a hash table (</a:t>
+                </a:r>
+                <a:r>
+                  <a:rPr lang="en-US" sz="2000" dirty="0" err="1"/>
+                  <a:t>e.g</a:t>
+                </a:r>
+                <a:r>
+                  <a:rPr lang="en-US" sz="2000" dirty="0"/>
+                  <a:t>, </a:t>
+                </a:r>
+                <a:r>
+                  <a:rPr lang="en-US" sz="2000" dirty="0" err="1">
+                    <a:solidFill>
+                      <a:srgbClr val="00B050"/>
+                    </a:solidFill>
+                  </a:rPr>
+                  <a:t>dict</a:t>
+                </a:r>
+                <a:r>
+                  <a:rPr lang="en-US" sz="2000" dirty="0"/>
+                  <a:t> from python) to store it</a:t>
+                </a:r>
+              </a:p>
+            </p:txBody>
+          </p:sp>
+        </mc:Choice>
+        <mc:Fallback>
+          <p:sp>
+            <p:nvSpPr>
+              <p:cNvPr id="3" name="Content Placeholder 2">
+                <a:extLst>
+                  <a:ext uri="{FF2B5EF4-FFF2-40B4-BE49-F238E27FC236}">
+                    <a16:creationId xmlns:a16="http://schemas.microsoft.com/office/drawing/2014/main" id="{9E3FBD06-2D51-6284-AEC8-6303CA73B5A4}"/>
+                  </a:ext>
+                </a:extLst>
+              </p:cNvPr>
+              <p:cNvSpPr>
+                <a:spLocks noGrp="1" noRot="1" noChangeAspect="1" noMove="1" noResize="1" noEditPoints="1" noAdjustHandles="1" noChangeArrowheads="1" noChangeShapeType="1" noTextEdit="1"/>
+              </p:cNvSpPr>
+              <p:nvPr>
+                <p:ph sz="quarter" idx="1"/>
+              </p:nvPr>
+            </p:nvSpPr>
+            <p:spPr>
+              <a:blipFill>
+                <a:blip r:embed="rId2"/>
+                <a:stretch>
+                  <a:fillRect l="-389" t="-988"/>
+                </a:stretch>
+              </a:blipFill>
+            </p:spPr>
+            <p:txBody>
+              <a:bodyPr/>
+              <a:lstStyle/>
+              <a:p>
+                <a:r>
+                  <a:rPr lang="en-US">
+                    <a:noFill/>
+                  </a:rPr>
+                  <a:t> </a:t>
+                </a:r>
+              </a:p>
+            </p:txBody>
+          </p:sp>
+        </mc:Fallback>
+      </mc:AlternateContent>
+    </p:spTree>
+    <p:extLst>
+      <p:ext uri="{BB962C8B-B14F-4D97-AF65-F5344CB8AC3E}">
+        <p14:creationId xmlns:p14="http://schemas.microsoft.com/office/powerpoint/2010/main" val="740499585"/>
+      </p:ext>
+    </p:extLst>
+  </p:cSld>
+  <p:clrMapOvr>
+    <a:masterClrMapping/>
+  </p:clrMapOvr>
+  <p:timing>
+    <p:tnLst>
+      <p:par>
+        <p:cTn id="1" dur="indefinite" restart="never" nodeType="tmRoot">
+          <p:childTnLst>
+            <p:seq concurrent="1" nextAc="seek">
+              <p:cTn id="2" dur="indefinite" nodeType="mainSeq">
+                <p:childTnLst>
+                  <p:par>
+                    <p:cTn id="3" fill="hold">
+                      <p:stCondLst>
+                        <p:cond delay="indefinite"/>
+                      </p:stCondLst>
+                      <p:childTnLst>
+                        <p:par>
+                          <p:cTn id="4" fill="hold">
+                            <p:stCondLst>
+                              <p:cond delay="0"/>
+                            </p:stCondLst>
+                            <p:childTnLst>
+                              <p:par>
+                                <p:cTn id="5" presetID="1" presetClass="entr" presetSubtype="0" fill="hold" nodeType="clickEffect">
+                                  <p:stCondLst>
+                                    <p:cond delay="0"/>
+                                  </p:stCondLst>
+                                  <p:childTnLst>
+                                    <p:set>
+                                      <p:cBhvr>
+                                        <p:cTn id="6" dur="1" fill="hold">
+                                          <p:stCondLst>
+                                            <p:cond delay="0"/>
+                                          </p:stCondLst>
+                                        </p:cTn>
+                                        <p:tgtEl>
+                                          <p:spTgt spid="3">
+                                            <p:txEl>
+                                              <p:pRg st="8" end="8"/>
+                                            </p:txEl>
+                                          </p:spTgt>
+                                        </p:tgtEl>
+                                        <p:attrNameLst>
+                                          <p:attrName>style.visibility</p:attrName>
+                                        </p:attrNameLst>
+                                      </p:cBhvr>
+                                      <p:to>
+                                        <p:strVal val="visible"/>
+                                      </p:to>
+                                    </p:set>
+                                  </p:childTnLst>
+                                </p:cTn>
+                              </p:par>
+                              <p:par>
+                                <p:cTn id="7" presetID="1" presetClass="entr" presetSubtype="0" fill="hold" nodeType="withEffect">
+                                  <p:stCondLst>
+                                    <p:cond delay="0"/>
+                                  </p:stCondLst>
+                                  <p:childTnLst>
+                                    <p:set>
+                                      <p:cBhvr>
+                                        <p:cTn id="8" dur="1" fill="hold">
+                                          <p:stCondLst>
+                                            <p:cond delay="0"/>
+                                          </p:stCondLst>
+                                        </p:cTn>
+                                        <p:tgtEl>
+                                          <p:spTgt spid="3">
+                                            <p:txEl>
+                                              <p:pRg st="9" end="9"/>
+                                            </p:txEl>
+                                          </p:spTgt>
+                                        </p:tgtEl>
+                                        <p:attrNameLst>
+                                          <p:attrName>style.visibility</p:attrName>
+                                        </p:attrNameLst>
+                                      </p:cBhvr>
+                                      <p:to>
+                                        <p:strVal val="visible"/>
+                                      </p:to>
+                                    </p:set>
+                                  </p:childTnLst>
+                                </p:cTn>
+                              </p:par>
+                              <p:par>
+                                <p:cTn id="9" presetID="1" presetClass="entr" presetSubtype="0" fill="hold" nodeType="withEffect">
+                                  <p:stCondLst>
+                                    <p:cond delay="0"/>
+                                  </p:stCondLst>
+                                  <p:childTnLst>
+                                    <p:set>
+                                      <p:cBhvr>
+                                        <p:cTn id="10" dur="1" fill="hold">
+                                          <p:stCondLst>
+                                            <p:cond delay="0"/>
+                                          </p:stCondLst>
+                                        </p:cTn>
+                                        <p:tgtEl>
+                                          <p:spTgt spid="3">
+                                            <p:txEl>
+                                              <p:pRg st="10" end="10"/>
+                                            </p:txEl>
+                                          </p:spTgt>
+                                        </p:tgtEl>
+                                        <p:attrNameLst>
+                                          <p:attrName>style.visibility</p:attrName>
+                                        </p:attrNameLst>
+                                      </p:cBhvr>
+                                      <p:to>
+                                        <p:strVal val="visible"/>
+                                      </p:to>
+                                    </p:set>
+                                  </p:childTnLst>
+                                </p:cTn>
+                              </p:par>
+                            </p:childTnLst>
+                          </p:cTn>
+                        </p:par>
+                      </p:childTnLst>
+                    </p:cTn>
+                  </p:par>
+                </p:childTnLst>
+              </p:cTn>
+              <p:prevCondLst>
+                <p:cond evt="onPrev" delay="0">
+                  <p:tgtEl>
+                    <p:sldTgt/>
+                  </p:tgtEl>
+                </p:cond>
+              </p:prevCondLst>
+              <p:nextCondLst>
+                <p:cond evt="onNext" delay="0">
+                  <p:tgtEl>
+                    <p:sldTgt/>
+                  </p:tgtEl>
+                </p:cond>
+              </p:nextCondLst>
+            </p:seq>
+          </p:childTnLst>
+        </p:cTn>
+      </p:par>
+    </p:tnLst>
+  </p:timing>
+</p:sld>
+</file>
+
+<file path=ppt/slides/slide11.xml><?xml version="1.0" encoding="utf-8"?>
+<p:sld xmlns:a="http://schemas.openxmlformats.org/drawingml/2006/main" xmlns:r="http://schemas.openxmlformats.org/officeDocument/2006/relationships" xmlns:p="http://schemas.openxmlformats.org/presentationml/2006/main">
+  <p:cSld>
+    <p:spTree>
+      <p:nvGrpSpPr>
+        <p:cNvPr id="1" name=""/>
+        <p:cNvGrpSpPr/>
+        <p:nvPr/>
+      </p:nvGrpSpPr>
+      <p:grpSpPr>
+        <a:xfrm>
+          <a:off x="0" y="0"/>
+          <a:ext cx="0" cy="0"/>
+          <a:chOff x="0" y="0"/>
+          <a:chExt cx="0" cy="0"/>
+        </a:xfrm>
+      </p:grpSpPr>
+      <p:sp>
+        <p:nvSpPr>
+          <p:cNvPr id="2" name="Title 1">
+            <a:extLst>
+              <a:ext uri="{FF2B5EF4-FFF2-40B4-BE49-F238E27FC236}">
+                <a16:creationId xmlns:a16="http://schemas.microsoft.com/office/drawing/2014/main" id="{28E5058D-473E-48E7-B9A2-7688C33B4EDB}"/>
+              </a:ext>
+            </a:extLst>
+          </p:cNvPr>
+          <p:cNvSpPr>
+            <a:spLocks noGrp="1"/>
+          </p:cNvSpPr>
+          <p:nvPr>
+            <p:ph type="title"/>
+          </p:nvPr>
+        </p:nvSpPr>
+        <p:spPr/>
+        <p:txBody>
+          <a:bodyPr/>
+          <a:lstStyle/>
+          <a:p>
+            <a:r>
+              <a:rPr lang="en-US" dirty="0"/>
+              <a:t>Pseudocode of BFS</a:t>
+            </a:r>
+          </a:p>
+        </p:txBody>
+      </p:sp>
+      <p:sp>
+        <p:nvSpPr>
+          <p:cNvPr id="3" name="Content Placeholder 2">
+            <a:extLst>
+              <a:ext uri="{FF2B5EF4-FFF2-40B4-BE49-F238E27FC236}">
+                <a16:creationId xmlns:a16="http://schemas.microsoft.com/office/drawing/2014/main" id="{923D9880-036B-4486-9064-6EE4ABD4EAA9}"/>
+              </a:ext>
+            </a:extLst>
+          </p:cNvPr>
+          <p:cNvSpPr>
+            <a:spLocks noGrp="1"/>
+          </p:cNvSpPr>
+          <p:nvPr>
+            <p:ph sz="quarter" idx="1"/>
+          </p:nvPr>
+        </p:nvSpPr>
+        <p:spPr/>
+        <p:txBody>
+          <a:bodyPr/>
+          <a:lstStyle/>
+          <a:p>
+            <a:endParaRPr lang="en-US"/>
+          </a:p>
+        </p:txBody>
+      </p:sp>
+      <p:pic>
+        <p:nvPicPr>
+          <p:cNvPr id="6" name="Picture 5">
+            <a:extLst>
+              <a:ext uri="{FF2B5EF4-FFF2-40B4-BE49-F238E27FC236}">
+                <a16:creationId xmlns:a16="http://schemas.microsoft.com/office/drawing/2014/main" id="{25BF26C8-CCE4-4486-9554-E7D0FF8DAB8E}"/>
+              </a:ext>
+            </a:extLst>
+          </p:cNvPr>
+          <p:cNvPicPr>
+            <a:picLocks noChangeAspect="1"/>
+          </p:cNvPicPr>
+          <p:nvPr/>
+        </p:nvPicPr>
+        <p:blipFill>
+          <a:blip r:embed="rId2"/>
+          <a:stretch>
+            <a:fillRect/>
+          </a:stretch>
+        </p:blipFill>
+        <p:spPr>
+          <a:xfrm>
+            <a:off x="1857375" y="1411605"/>
+            <a:ext cx="8477250" cy="4552950"/>
+          </a:xfrm>
+          <a:prstGeom prst="rect">
+            <a:avLst/>
+          </a:prstGeom>
+          <a:ln w="12700">
+            <a:solidFill>
+              <a:schemeClr val="tx1"/>
+            </a:solidFill>
+          </a:ln>
+        </p:spPr>
+      </p:pic>
+    </p:spTree>
+    <p:extLst>
+      <p:ext uri="{BB962C8B-B14F-4D97-AF65-F5344CB8AC3E}">
+        <p14:creationId xmlns:p14="http://schemas.microsoft.com/office/powerpoint/2010/main" val="444250267"/>
+      </p:ext>
+    </p:extLst>
+  </p:cSld>
+  <p:clrMapOvr>
+    <a:masterClrMapping/>
+  </p:clrMapOvr>
+</p:sld>
+</file>
+
+<file path=ppt/slides/slide12.xml><?xml version="1.0" encoding="utf-8"?>
+<p:sld xmlns:a="http://schemas.openxmlformats.org/drawingml/2006/main" xmlns:r="http://schemas.openxmlformats.org/officeDocument/2006/relationships" xmlns:p="http://schemas.openxmlformats.org/presentationml/2006/main">
+  <p:cSld>
+    <p:spTree>
+      <p:nvGrpSpPr>
         <p:cNvPr id="1" name=""/>
         <p:cNvGrpSpPr/>
         <p:nvPr/>
@@ -9415,7 +10026,106 @@
 </p:sld>
 </file>
 
-<file path=ppt/slides/slide11.xml><?xml version="1.0" encoding="utf-8"?>
+<file path=ppt/slides/slide13.xml><?xml version="1.0" encoding="utf-8"?>
+<p:sld xmlns:a="http://schemas.openxmlformats.org/drawingml/2006/main" xmlns:r="http://schemas.openxmlformats.org/officeDocument/2006/relationships" xmlns:p="http://schemas.openxmlformats.org/presentationml/2006/main">
+  <p:cSld>
+    <p:spTree>
+      <p:nvGrpSpPr>
+        <p:cNvPr id="1" name="">
+          <a:extLst>
+            <a:ext uri="{FF2B5EF4-FFF2-40B4-BE49-F238E27FC236}">
+              <a16:creationId xmlns:a16="http://schemas.microsoft.com/office/drawing/2014/main" id="{B11F9A4E-7831-DF30-96ED-0D1977FA31CD}"/>
+            </a:ext>
+          </a:extLst>
+        </p:cNvPr>
+        <p:cNvGrpSpPr/>
+        <p:nvPr/>
+      </p:nvGrpSpPr>
+      <p:grpSpPr>
+        <a:xfrm>
+          <a:off x="0" y="0"/>
+          <a:ext cx="0" cy="0"/>
+          <a:chOff x="0" y="0"/>
+          <a:chExt cx="0" cy="0"/>
+        </a:xfrm>
+      </p:grpSpPr>
+      <p:sp>
+        <p:nvSpPr>
+          <p:cNvPr id="2" name="Title 1">
+            <a:extLst>
+              <a:ext uri="{FF2B5EF4-FFF2-40B4-BE49-F238E27FC236}">
+                <a16:creationId xmlns:a16="http://schemas.microsoft.com/office/drawing/2014/main" id="{633A82E5-FDA6-124D-DBC4-02E3983B22A5}"/>
+              </a:ext>
+            </a:extLst>
+          </p:cNvPr>
+          <p:cNvSpPr>
+            <a:spLocks noGrp="1"/>
+          </p:cNvSpPr>
+          <p:nvPr>
+            <p:ph type="title"/>
+          </p:nvPr>
+        </p:nvSpPr>
+        <p:spPr/>
+        <p:txBody>
+          <a:bodyPr/>
+          <a:lstStyle/>
+          <a:p>
+            <a:r>
+              <a:rPr lang="en-US" dirty="0"/>
+              <a:t>Python code for BFS</a:t>
+            </a:r>
+          </a:p>
+        </p:txBody>
+      </p:sp>
+      <p:pic>
+        <p:nvPicPr>
+          <p:cNvPr id="5" name="Picture 4">
+            <a:extLst>
+              <a:ext uri="{FF2B5EF4-FFF2-40B4-BE49-F238E27FC236}">
+                <a16:creationId xmlns:a16="http://schemas.microsoft.com/office/drawing/2014/main" id="{A684A70C-907A-13AB-3181-11644B81E2F4}"/>
+              </a:ext>
+            </a:extLst>
+          </p:cNvPr>
+          <p:cNvPicPr>
+            <a:picLocks noChangeAspect="1"/>
+          </p:cNvPicPr>
+          <p:nvPr/>
+        </p:nvPicPr>
+        <p:blipFill>
+          <a:blip r:embed="rId2"/>
+          <a:stretch>
+            <a:fillRect/>
+          </a:stretch>
+        </p:blipFill>
+        <p:spPr>
+          <a:xfrm>
+            <a:off x="1981200" y="1431758"/>
+            <a:ext cx="8229600" cy="4588043"/>
+          </a:xfrm>
+          <a:prstGeom prst="rect">
+            <a:avLst/>
+          </a:prstGeom>
+          <a:ln w="12700">
+            <a:solidFill>
+              <a:schemeClr val="tx1"/>
+            </a:solidFill>
+          </a:ln>
+        </p:spPr>
+      </p:pic>
+    </p:spTree>
+    <p:extLst>
+      <p:ext uri="{BB962C8B-B14F-4D97-AF65-F5344CB8AC3E}">
+        <p14:creationId xmlns:p14="http://schemas.microsoft.com/office/powerpoint/2010/main" val="4060665317"/>
+      </p:ext>
+    </p:extLst>
+  </p:cSld>
+  <p:clrMapOvr>
+    <a:masterClrMapping/>
+  </p:clrMapOvr>
+</p:sld>
+</file>
+
+<file path=ppt/slides/slide14.xml><?xml version="1.0" encoding="utf-8"?>
 <p:sld xmlns:a="http://schemas.openxmlformats.org/drawingml/2006/main" xmlns:r="http://schemas.openxmlformats.org/officeDocument/2006/relationships" xmlns:p="http://schemas.openxmlformats.org/presentationml/2006/main">
   <p:cSld>
     <p:spTree>
@@ -9722,7 +10432,7 @@
 </p:sld>
 </file>
 
-<file path=ppt/slides/slide12.xml><?xml version="1.0" encoding="utf-8"?>
+<file path=ppt/slides/slide15.xml><?xml version="1.0" encoding="utf-8"?>
 <p:sld xmlns:a="http://schemas.openxmlformats.org/drawingml/2006/main" xmlns:r="http://schemas.openxmlformats.org/officeDocument/2006/relationships" xmlns:p="http://schemas.openxmlformats.org/presentationml/2006/main">
   <p:cSld>
     <p:spTree>
@@ -9767,14 +10477,387 @@
           </a:p>
         </p:txBody>
       </p:sp>
-      <mc:AlternateContent xmlns:mc="http://schemas.openxmlformats.org/markup-compatibility/2006" xmlns:a14="http://schemas.microsoft.com/office/drawing/2010/main">
-        <mc:Choice Requires="a14">
+      <mc:AlternateContent xmlns:mc="http://schemas.openxmlformats.org/markup-compatibility/2006">
+        <mc:Choice xmlns:a14="http://schemas.microsoft.com/office/drawing/2010/main" Requires="a14">
           <p:sp>
             <p:nvSpPr>
               <p:cNvPr id="3" name="Content Placeholder 2">
                 <a:extLst>
                   <a:ext uri="{FF2B5EF4-FFF2-40B4-BE49-F238E27FC236}">
                     <a16:creationId xmlns:a16="http://schemas.microsoft.com/office/drawing/2014/main" id="{2DEBC272-883C-4D8F-85AC-A94C113B3F89}"/>
+                  </a:ext>
+                </a:extLst>
+              </p:cNvPr>
+              <p:cNvSpPr>
+                <a:spLocks noGrp="1"/>
+              </p:cNvSpPr>
+              <p:nvPr>
+                <p:ph sz="quarter" idx="1"/>
+              </p:nvPr>
+            </p:nvSpPr>
+            <p:spPr>
+              <a:xfrm>
+                <a:off x="609600" y="1219200"/>
+                <a:ext cx="9601200" cy="5334000"/>
+              </a:xfrm>
+            </p:spPr>
+            <p:txBody>
+              <a:bodyPr/>
+              <a:lstStyle/>
+              <a:p>
+                <a:r>
+                  <a:rPr lang="en-US" dirty="0"/>
+                  <a:t>The same algorithm works for both undirected and directed graphs </a:t>
+                </a:r>
+              </a:p>
+              <a:p>
+                <a:endParaRPr lang="en-US" sz="800" dirty="0"/>
+              </a:p>
+              <a:p>
+                <a:r>
+                  <a:rPr lang="en-US" dirty="0"/>
+                  <a:t>Claim: </a:t>
+                </a:r>
+              </a:p>
+              <a:p>
+                <a:pPr lvl="1"/>
+                <a:r>
+                  <a:rPr lang="en-US" dirty="0"/>
+                  <a:t>BFS(</a:t>
+                </a:r>
+                <a14:m>
+                  <m:oMath xmlns:m="http://schemas.openxmlformats.org/officeDocument/2006/math">
+                    <m:r>
+                      <a:rPr lang="en-US" b="0" i="1" smtClean="0">
+                        <a:latin typeface="Cambria Math" panose="02040503050406030204" pitchFamily="18" charset="0"/>
+                      </a:rPr>
+                      <m:t>𝐺</m:t>
+                    </m:r>
+                    <m:r>
+                      <a:rPr lang="en-US" b="0" i="1" smtClean="0">
+                        <a:latin typeface="Cambria Math" panose="02040503050406030204" pitchFamily="18" charset="0"/>
+                      </a:rPr>
+                      <m:t>, </m:t>
+                    </m:r>
+                    <m:r>
+                      <a:rPr lang="en-US" b="0" i="1" smtClean="0">
+                        <a:latin typeface="Cambria Math" panose="02040503050406030204" pitchFamily="18" charset="0"/>
+                      </a:rPr>
+                      <m:t>𝑠</m:t>
+                    </m:r>
+                    <m:r>
+                      <a:rPr lang="en-US" b="0" i="1" smtClean="0">
+                        <a:latin typeface="Cambria Math" panose="02040503050406030204" pitchFamily="18" charset="0"/>
+                      </a:rPr>
+                      <m:t>) </m:t>
+                    </m:r>
+                  </m:oMath>
+                </a14:m>
+                <a:r>
+                  <a:rPr lang="en-US" dirty="0"/>
+                  <a:t>will visit exactly the set of nodes that are reachable from the source </a:t>
+                </a:r>
+                <a14:m>
+                  <m:oMath xmlns:m="http://schemas.openxmlformats.org/officeDocument/2006/math">
+                    <m:r>
+                      <a:rPr lang="en-US" i="1">
+                        <a:latin typeface="Cambria Math" panose="02040503050406030204" pitchFamily="18" charset="0"/>
+                      </a:rPr>
+                      <m:t>𝑠</m:t>
+                    </m:r>
+                  </m:oMath>
+                </a14:m>
+                <a:r>
+                  <a:rPr lang="en-US" dirty="0"/>
+                  <a:t> in the graph </a:t>
+                </a:r>
+                <a14:m>
+                  <m:oMath xmlns:m="http://schemas.openxmlformats.org/officeDocument/2006/math">
+                    <m:r>
+                      <a:rPr lang="en-US" b="0" i="1" smtClean="0">
+                        <a:latin typeface="Cambria Math" panose="02040503050406030204" pitchFamily="18" charset="0"/>
+                      </a:rPr>
+                      <m:t>𝐺</m:t>
+                    </m:r>
+                  </m:oMath>
+                </a14:m>
+                <a:endParaRPr lang="en-US" dirty="0"/>
+              </a:p>
+              <a:p>
+                <a:pPr lvl="1"/>
+                <a:r>
+                  <a:rPr lang="en-US" dirty="0"/>
+                  <a:t>Why?   </a:t>
+                </a:r>
+              </a:p>
+              <a:p>
+                <a:pPr lvl="1"/>
+                <a:endParaRPr lang="en-US" sz="800" dirty="0"/>
+              </a:p>
+              <a:p>
+                <a:pPr lvl="1"/>
+                <a:endParaRPr lang="en-US" dirty="0"/>
+              </a:p>
+            </p:txBody>
+          </p:sp>
+        </mc:Choice>
+        <mc:Fallback>
+          <p:sp>
+            <p:nvSpPr>
+              <p:cNvPr id="3" name="Content Placeholder 2">
+                <a:extLst>
+                  <a:ext uri="{FF2B5EF4-FFF2-40B4-BE49-F238E27FC236}">
+                    <a16:creationId xmlns:a16="http://schemas.microsoft.com/office/drawing/2014/main" id="{2DEBC272-883C-4D8F-85AC-A94C113B3F89}"/>
+                  </a:ext>
+                </a:extLst>
+              </p:cNvPr>
+              <p:cNvSpPr>
+                <a:spLocks noGrp="1" noRot="1" noChangeAspect="1" noMove="1" noResize="1" noEditPoints="1" noAdjustHandles="1" noChangeArrowheads="1" noChangeShapeType="1" noTextEdit="1"/>
+              </p:cNvSpPr>
+              <p:nvPr>
+                <p:ph sz="quarter" idx="1"/>
+              </p:nvPr>
+            </p:nvSpPr>
+            <p:spPr>
+              <a:xfrm>
+                <a:off x="609600" y="1219200"/>
+                <a:ext cx="9601200" cy="5334000"/>
+              </a:xfrm>
+              <a:blipFill>
+                <a:blip r:embed="rId2"/>
+                <a:stretch>
+                  <a:fillRect l="-571" t="-1029" r="-889"/>
+                </a:stretch>
+              </a:blipFill>
+            </p:spPr>
+            <p:txBody>
+              <a:bodyPr/>
+              <a:lstStyle/>
+              <a:p>
+                <a:r>
+                  <a:rPr lang="en-US">
+                    <a:noFill/>
+                  </a:rPr>
+                  <a:t> </a:t>
+                </a:r>
+              </a:p>
+            </p:txBody>
+          </p:sp>
+        </mc:Fallback>
+      </mc:AlternateContent>
+    </p:spTree>
+    <p:extLst>
+      <p:ext uri="{BB962C8B-B14F-4D97-AF65-F5344CB8AC3E}">
+        <p14:creationId xmlns:p14="http://schemas.microsoft.com/office/powerpoint/2010/main" val="3948342070"/>
+      </p:ext>
+    </p:extLst>
+  </p:cSld>
+  <p:clrMapOvr>
+    <a:masterClrMapping/>
+  </p:clrMapOvr>
+  <p:timing>
+    <p:tnLst>
+      <p:par>
+        <p:cTn id="1" dur="indefinite" restart="never" nodeType="tmRoot">
+          <p:childTnLst>
+            <p:seq concurrent="1" nextAc="seek">
+              <p:cTn id="2" dur="indefinite" nodeType="mainSeq">
+                <p:childTnLst>
+                  <p:par>
+                    <p:cTn id="3" fill="hold">
+                      <p:stCondLst>
+                        <p:cond delay="indefinite"/>
+                      </p:stCondLst>
+                      <p:childTnLst>
+                        <p:par>
+                          <p:cTn id="4" fill="hold">
+                            <p:stCondLst>
+                              <p:cond delay="0"/>
+                            </p:stCondLst>
+                            <p:childTnLst>
+                              <p:par>
+                                <p:cTn id="5" presetID="1" presetClass="entr" presetSubtype="0" fill="hold" nodeType="clickEffect">
+                                  <p:stCondLst>
+                                    <p:cond delay="0"/>
+                                  </p:stCondLst>
+                                  <p:childTnLst>
+                                    <p:set>
+                                      <p:cBhvr>
+                                        <p:cTn id="6" dur="1" fill="hold">
+                                          <p:stCondLst>
+                                            <p:cond delay="0"/>
+                                          </p:stCondLst>
+                                        </p:cTn>
+                                        <p:tgtEl>
+                                          <p:spTgt spid="3">
+                                            <p:txEl>
+                                              <p:pRg st="2" end="2"/>
+                                            </p:txEl>
+                                          </p:spTgt>
+                                        </p:tgtEl>
+                                        <p:attrNameLst>
+                                          <p:attrName>style.visibility</p:attrName>
+                                        </p:attrNameLst>
+                                      </p:cBhvr>
+                                      <p:to>
+                                        <p:strVal val="visible"/>
+                                      </p:to>
+                                    </p:set>
+                                  </p:childTnLst>
+                                </p:cTn>
+                              </p:par>
+                              <p:par>
+                                <p:cTn id="7" presetID="1" presetClass="entr" presetSubtype="0" fill="hold" nodeType="withEffect">
+                                  <p:stCondLst>
+                                    <p:cond delay="0"/>
+                                  </p:stCondLst>
+                                  <p:childTnLst>
+                                    <p:set>
+                                      <p:cBhvr>
+                                        <p:cTn id="8" dur="1" fill="hold">
+                                          <p:stCondLst>
+                                            <p:cond delay="0"/>
+                                          </p:stCondLst>
+                                        </p:cTn>
+                                        <p:tgtEl>
+                                          <p:spTgt spid="3">
+                                            <p:txEl>
+                                              <p:pRg st="3" end="3"/>
+                                            </p:txEl>
+                                          </p:spTgt>
+                                        </p:tgtEl>
+                                        <p:attrNameLst>
+                                          <p:attrName>style.visibility</p:attrName>
+                                        </p:attrNameLst>
+                                      </p:cBhvr>
+                                      <p:to>
+                                        <p:strVal val="visible"/>
+                                      </p:to>
+                                    </p:set>
+                                  </p:childTnLst>
+                                </p:cTn>
+                              </p:par>
+                              <p:par>
+                                <p:cTn id="9" presetID="1" presetClass="entr" presetSubtype="0" fill="hold" nodeType="withEffect">
+                                  <p:stCondLst>
+                                    <p:cond delay="0"/>
+                                  </p:stCondLst>
+                                  <p:childTnLst>
+                                    <p:set>
+                                      <p:cBhvr>
+                                        <p:cTn id="10" dur="1" fill="hold">
+                                          <p:stCondLst>
+                                            <p:cond delay="0"/>
+                                          </p:stCondLst>
+                                        </p:cTn>
+                                        <p:tgtEl>
+                                          <p:spTgt spid="3">
+                                            <p:txEl>
+                                              <p:pRg st="4" end="4"/>
+                                            </p:txEl>
+                                          </p:spTgt>
+                                        </p:tgtEl>
+                                        <p:attrNameLst>
+                                          <p:attrName>style.visibility</p:attrName>
+                                        </p:attrNameLst>
+                                      </p:cBhvr>
+                                      <p:to>
+                                        <p:strVal val="visible"/>
+                                      </p:to>
+                                    </p:set>
+                                  </p:childTnLst>
+                                </p:cTn>
+                              </p:par>
+                            </p:childTnLst>
+                          </p:cTn>
+                        </p:par>
+                      </p:childTnLst>
+                    </p:cTn>
+                  </p:par>
+                </p:childTnLst>
+              </p:cTn>
+              <p:prevCondLst>
+                <p:cond evt="onPrev" delay="0">
+                  <p:tgtEl>
+                    <p:sldTgt/>
+                  </p:tgtEl>
+                </p:cond>
+              </p:prevCondLst>
+              <p:nextCondLst>
+                <p:cond evt="onNext" delay="0">
+                  <p:tgtEl>
+                    <p:sldTgt/>
+                  </p:tgtEl>
+                </p:cond>
+              </p:nextCondLst>
+            </p:seq>
+          </p:childTnLst>
+        </p:cTn>
+      </p:par>
+    </p:tnLst>
+  </p:timing>
+</p:sld>
+</file>
+
+<file path=ppt/slides/slide16.xml><?xml version="1.0" encoding="utf-8"?>
+<p:sld xmlns:a="http://schemas.openxmlformats.org/drawingml/2006/main" xmlns:r="http://schemas.openxmlformats.org/officeDocument/2006/relationships" xmlns:p="http://schemas.openxmlformats.org/presentationml/2006/main">
+  <p:cSld>
+    <p:spTree>
+      <p:nvGrpSpPr>
+        <p:cNvPr id="1" name="">
+          <a:extLst>
+            <a:ext uri="{FF2B5EF4-FFF2-40B4-BE49-F238E27FC236}">
+              <a16:creationId xmlns:a16="http://schemas.microsoft.com/office/drawing/2014/main" id="{D9244369-6A0F-AB17-4F78-AFAF37A75E38}"/>
+            </a:ext>
+          </a:extLst>
+        </p:cNvPr>
+        <p:cNvGrpSpPr/>
+        <p:nvPr/>
+      </p:nvGrpSpPr>
+      <p:grpSpPr>
+        <a:xfrm>
+          <a:off x="0" y="0"/>
+          <a:ext cx="0" cy="0"/>
+          <a:chOff x="0" y="0"/>
+          <a:chExt cx="0" cy="0"/>
+        </a:xfrm>
+      </p:grpSpPr>
+      <p:sp>
+        <p:nvSpPr>
+          <p:cNvPr id="2" name="Title 1">
+            <a:extLst>
+              <a:ext uri="{FF2B5EF4-FFF2-40B4-BE49-F238E27FC236}">
+                <a16:creationId xmlns:a16="http://schemas.microsoft.com/office/drawing/2014/main" id="{077DFF5A-FC94-626B-4C58-6A16F5EF47A7}"/>
+              </a:ext>
+            </a:extLst>
+          </p:cNvPr>
+          <p:cNvSpPr>
+            <a:spLocks noGrp="1"/>
+          </p:cNvSpPr>
+          <p:nvPr>
+            <p:ph type="title"/>
+          </p:nvPr>
+        </p:nvSpPr>
+        <p:spPr/>
+        <p:txBody>
+          <a:bodyPr/>
+          <a:lstStyle/>
+          <a:p>
+            <a:r>
+              <a:rPr lang="en-US" dirty="0"/>
+              <a:t>Remarks</a:t>
+            </a:r>
+          </a:p>
+        </p:txBody>
+      </p:sp>
+      <mc:AlternateContent xmlns:mc="http://schemas.openxmlformats.org/markup-compatibility/2006">
+        <mc:Choice xmlns:a14="http://schemas.microsoft.com/office/drawing/2010/main" Requires="a14">
+          <p:sp>
+            <p:nvSpPr>
+              <p:cNvPr id="3" name="Content Placeholder 2">
+                <a:extLst>
+                  <a:ext uri="{FF2B5EF4-FFF2-40B4-BE49-F238E27FC236}">
+                    <a16:creationId xmlns:a16="http://schemas.microsoft.com/office/drawing/2014/main" id="{D59F73D6-350F-5C32-E169-6275B22ED9D3}"/>
                   </a:ext>
                 </a:extLst>
               </p:cNvPr>
@@ -9973,13 +11056,13 @@
             </p:txBody>
           </p:sp>
         </mc:Choice>
-        <mc:Fallback xmlns="">
+        <mc:Fallback>
           <p:sp>
             <p:nvSpPr>
               <p:cNvPr id="3" name="Content Placeholder 2">
                 <a:extLst>
                   <a:ext uri="{FF2B5EF4-FFF2-40B4-BE49-F238E27FC236}">
-                    <a16:creationId xmlns:a16="http://schemas.microsoft.com/office/drawing/2014/main" id="{2DEBC272-883C-4D8F-85AC-A94C113B3F89}"/>
+                    <a16:creationId xmlns:a16="http://schemas.microsoft.com/office/drawing/2014/main" id="{D59F73D6-350F-5C32-E169-6275B22ED9D3}"/>
                   </a:ext>
                 </a:extLst>
               </p:cNvPr>
@@ -10020,7 +11103,7 @@
     </p:spTree>
     <p:extLst>
       <p:ext uri="{BB962C8B-B14F-4D97-AF65-F5344CB8AC3E}">
-        <p14:creationId xmlns:p14="http://schemas.microsoft.com/office/powerpoint/2010/main" val="3948342070"/>
+        <p14:creationId xmlns:p14="http://schemas.microsoft.com/office/powerpoint/2010/main" val="265754005"/>
       </p:ext>
     </p:extLst>
   </p:cSld>
@@ -10362,7 +11445,7 @@
 </p:sld>
 </file>
 
-<file path=ppt/slides/slide13.xml><?xml version="1.0" encoding="utf-8"?>
+<file path=ppt/slides/slide17.xml><?xml version="1.0" encoding="utf-8"?>
 <p:sld xmlns:a="http://schemas.openxmlformats.org/drawingml/2006/main" xmlns:r="http://schemas.openxmlformats.org/officeDocument/2006/relationships" xmlns:p="http://schemas.openxmlformats.org/presentationml/2006/main">
   <p:cSld>
     <p:spTree>
@@ -10426,7 +11509,7 @@
 </p:sld>
 </file>
 
-<file path=ppt/slides/slide14.xml><?xml version="1.0" encoding="utf-8"?>
+<file path=ppt/slides/slide18.xml><?xml version="1.0" encoding="utf-8"?>
 <p:sld xmlns:a="http://schemas.openxmlformats.org/drawingml/2006/main" xmlns:r="http://schemas.openxmlformats.org/officeDocument/2006/relationships" xmlns:p="http://schemas.openxmlformats.org/presentationml/2006/main">
   <p:cSld>
     <p:spTree>
@@ -10468,14 +11551,291 @@
           </a:p>
         </p:txBody>
       </p:sp>
-      <mc:AlternateContent xmlns:mc="http://schemas.openxmlformats.org/markup-compatibility/2006" xmlns:a14="http://schemas.microsoft.com/office/drawing/2010/main">
-        <mc:Choice Requires="a14">
+      <mc:AlternateContent xmlns:mc="http://schemas.openxmlformats.org/markup-compatibility/2006">
+        <mc:Choice xmlns:a14="http://schemas.microsoft.com/office/drawing/2010/main" Requires="a14">
           <p:sp>
             <p:nvSpPr>
               <p:cNvPr id="3" name="Content Placeholder 2">
                 <a:extLst>
                   <a:ext uri="{FF2B5EF4-FFF2-40B4-BE49-F238E27FC236}">
                     <a16:creationId xmlns:a16="http://schemas.microsoft.com/office/drawing/2014/main" id="{82B59FDF-DC83-4FCF-9381-C7F916A8C928}"/>
+                  </a:ext>
+                </a:extLst>
+              </p:cNvPr>
+              <p:cNvSpPr>
+                <a:spLocks noGrp="1"/>
+              </p:cNvSpPr>
+              <p:nvPr>
+                <p:ph sz="quarter" idx="1"/>
+              </p:nvPr>
+            </p:nvSpPr>
+            <p:spPr/>
+            <p:txBody>
+              <a:bodyPr/>
+              <a:lstStyle/>
+              <a:p>
+                <a:r>
+                  <a:rPr lang="en-US" dirty="0"/>
+                  <a:t>Note that BFS(</a:t>
+                </a:r>
+                <a14:m>
+                  <m:oMath xmlns:m="http://schemas.openxmlformats.org/officeDocument/2006/math">
+                    <m:r>
+                      <a:rPr lang="en-US" b="0" i="1" smtClean="0">
+                        <a:latin typeface="Cambria Math" panose="02040503050406030204" pitchFamily="18" charset="0"/>
+                      </a:rPr>
+                      <m:t>𝐺</m:t>
+                    </m:r>
+                    <m:r>
+                      <a:rPr lang="en-US" b="0" i="1" smtClean="0">
+                        <a:latin typeface="Cambria Math" panose="02040503050406030204" pitchFamily="18" charset="0"/>
+                      </a:rPr>
+                      <m:t>, </m:t>
+                    </m:r>
+                    <m:r>
+                      <a:rPr lang="en-US" b="0" i="1" smtClean="0">
+                        <a:latin typeface="Cambria Math" panose="02040503050406030204" pitchFamily="18" charset="0"/>
+                      </a:rPr>
+                      <m:t>𝑠</m:t>
+                    </m:r>
+                  </m:oMath>
+                </a14:m>
+                <a:r>
+                  <a:rPr lang="en-US" dirty="0"/>
+                  <a:t>) only visits nodes reachable from </a:t>
+                </a:r>
+                <a14:m>
+                  <m:oMath xmlns:m="http://schemas.openxmlformats.org/officeDocument/2006/math">
+                    <m:r>
+                      <a:rPr lang="en-US" i="1">
+                        <a:latin typeface="Cambria Math" panose="02040503050406030204" pitchFamily="18" charset="0"/>
+                      </a:rPr>
+                      <m:t>𝑠</m:t>
+                    </m:r>
+                  </m:oMath>
+                </a14:m>
+                <a:endParaRPr lang="en-US" dirty="0"/>
+              </a:p>
+              <a:p>
+                <a:r>
+                  <a:rPr lang="en-US" dirty="0"/>
+                  <a:t>So if </a:t>
+                </a:r>
+                <a14:m>
+                  <m:oMath xmlns:m="http://schemas.openxmlformats.org/officeDocument/2006/math">
+                    <m:r>
+                      <a:rPr lang="en-US" b="0" i="1" smtClean="0">
+                        <a:latin typeface="Cambria Math" panose="02040503050406030204" pitchFamily="18" charset="0"/>
+                      </a:rPr>
+                      <m:t>𝐺</m:t>
+                    </m:r>
+                  </m:oMath>
+                </a14:m>
+                <a:r>
+                  <a:rPr lang="en-US" dirty="0"/>
+                  <a:t> is disconnected, then it will not visit all nodes</a:t>
+                </a:r>
+              </a:p>
+              <a:p>
+                <a:endParaRPr lang="en-US" dirty="0"/>
+              </a:p>
+              <a:p>
+                <a:r>
+                  <a:rPr lang="en-US" dirty="0"/>
+                  <a:t>How to explore all nodes? </a:t>
+                </a:r>
+              </a:p>
+            </p:txBody>
+          </p:sp>
+        </mc:Choice>
+        <mc:Fallback>
+          <p:sp>
+            <p:nvSpPr>
+              <p:cNvPr id="3" name="Content Placeholder 2">
+                <a:extLst>
+                  <a:ext uri="{FF2B5EF4-FFF2-40B4-BE49-F238E27FC236}">
+                    <a16:creationId xmlns:a16="http://schemas.microsoft.com/office/drawing/2014/main" id="{82B59FDF-DC83-4FCF-9381-C7F916A8C928}"/>
+                  </a:ext>
+                </a:extLst>
+              </p:cNvPr>
+              <p:cNvSpPr>
+                <a:spLocks noGrp="1" noRot="1" noChangeAspect="1" noMove="1" noResize="1" noEditPoints="1" noAdjustHandles="1" noChangeArrowheads="1" noChangeShapeType="1" noTextEdit="1"/>
+              </p:cNvSpPr>
+              <p:nvPr>
+                <p:ph sz="quarter" idx="1"/>
+              </p:nvPr>
+            </p:nvSpPr>
+            <p:spPr>
+              <a:blipFill>
+                <a:blip r:embed="rId2"/>
+                <a:stretch>
+                  <a:fillRect l="-500" t="-1111"/>
+                </a:stretch>
+              </a:blipFill>
+            </p:spPr>
+            <p:txBody>
+              <a:bodyPr/>
+              <a:lstStyle/>
+              <a:p>
+                <a:r>
+                  <a:rPr lang="en-US">
+                    <a:noFill/>
+                  </a:rPr>
+                  <a:t> </a:t>
+                </a:r>
+              </a:p>
+            </p:txBody>
+          </p:sp>
+        </mc:Fallback>
+      </mc:AlternateContent>
+    </p:spTree>
+    <p:extLst>
+      <p:ext uri="{BB962C8B-B14F-4D97-AF65-F5344CB8AC3E}">
+        <p14:creationId xmlns:p14="http://schemas.microsoft.com/office/powerpoint/2010/main" val="3637747830"/>
+      </p:ext>
+    </p:extLst>
+  </p:cSld>
+  <p:clrMapOvr>
+    <a:masterClrMapping/>
+  </p:clrMapOvr>
+  <p:timing>
+    <p:tnLst>
+      <p:par>
+        <p:cTn id="1" dur="indefinite" restart="never" nodeType="tmRoot">
+          <p:childTnLst>
+            <p:seq concurrent="1" nextAc="seek">
+              <p:cTn id="2" dur="indefinite" nodeType="mainSeq">
+                <p:childTnLst>
+                  <p:par>
+                    <p:cTn id="3" fill="hold">
+                      <p:stCondLst>
+                        <p:cond delay="indefinite"/>
+                      </p:stCondLst>
+                      <p:childTnLst>
+                        <p:par>
+                          <p:cTn id="4" fill="hold">
+                            <p:stCondLst>
+                              <p:cond delay="0"/>
+                            </p:stCondLst>
+                            <p:childTnLst>
+                              <p:par>
+                                <p:cTn id="5" presetID="1" presetClass="entr" presetSubtype="0" fill="hold" nodeType="clickEffect">
+                                  <p:stCondLst>
+                                    <p:cond delay="0"/>
+                                  </p:stCondLst>
+                                  <p:childTnLst>
+                                    <p:set>
+                                      <p:cBhvr>
+                                        <p:cTn id="6" dur="1" fill="hold">
+                                          <p:stCondLst>
+                                            <p:cond delay="0"/>
+                                          </p:stCondLst>
+                                        </p:cTn>
+                                        <p:tgtEl>
+                                          <p:spTgt spid="3">
+                                            <p:txEl>
+                                              <p:pRg st="3" end="3"/>
+                                            </p:txEl>
+                                          </p:spTgt>
+                                        </p:tgtEl>
+                                        <p:attrNameLst>
+                                          <p:attrName>style.visibility</p:attrName>
+                                        </p:attrNameLst>
+                                      </p:cBhvr>
+                                      <p:to>
+                                        <p:strVal val="visible"/>
+                                      </p:to>
+                                    </p:set>
+                                  </p:childTnLst>
+                                </p:cTn>
+                              </p:par>
+                            </p:childTnLst>
+                          </p:cTn>
+                        </p:par>
+                      </p:childTnLst>
+                    </p:cTn>
+                  </p:par>
+                </p:childTnLst>
+              </p:cTn>
+              <p:prevCondLst>
+                <p:cond evt="onPrev" delay="0">
+                  <p:tgtEl>
+                    <p:sldTgt/>
+                  </p:tgtEl>
+                </p:cond>
+              </p:prevCondLst>
+              <p:nextCondLst>
+                <p:cond evt="onNext" delay="0">
+                  <p:tgtEl>
+                    <p:sldTgt/>
+                  </p:tgtEl>
+                </p:cond>
+              </p:nextCondLst>
+            </p:seq>
+          </p:childTnLst>
+        </p:cTn>
+      </p:par>
+    </p:tnLst>
+  </p:timing>
+</p:sld>
+</file>
+
+<file path=ppt/slides/slide19.xml><?xml version="1.0" encoding="utf-8"?>
+<p:sld xmlns:a="http://schemas.openxmlformats.org/drawingml/2006/main" xmlns:r="http://schemas.openxmlformats.org/officeDocument/2006/relationships" xmlns:p="http://schemas.openxmlformats.org/presentationml/2006/main">
+  <p:cSld>
+    <p:spTree>
+      <p:nvGrpSpPr>
+        <p:cNvPr id="1" name="">
+          <a:extLst>
+            <a:ext uri="{FF2B5EF4-FFF2-40B4-BE49-F238E27FC236}">
+              <a16:creationId xmlns:a16="http://schemas.microsoft.com/office/drawing/2014/main" id="{DEDA5D26-6CA8-2EE7-F0F2-03A5B336C41D}"/>
+            </a:ext>
+          </a:extLst>
+        </p:cNvPr>
+        <p:cNvGrpSpPr/>
+        <p:nvPr/>
+      </p:nvGrpSpPr>
+      <p:grpSpPr>
+        <a:xfrm>
+          <a:off x="0" y="0"/>
+          <a:ext cx="0" cy="0"/>
+          <a:chOff x="0" y="0"/>
+          <a:chExt cx="0" cy="0"/>
+        </a:xfrm>
+      </p:grpSpPr>
+      <p:sp>
+        <p:nvSpPr>
+          <p:cNvPr id="2" name="Title 1">
+            <a:extLst>
+              <a:ext uri="{FF2B5EF4-FFF2-40B4-BE49-F238E27FC236}">
+                <a16:creationId xmlns:a16="http://schemas.microsoft.com/office/drawing/2014/main" id="{13C3559D-F8DB-96DF-B771-D58F298898CB}"/>
+              </a:ext>
+            </a:extLst>
+          </p:cNvPr>
+          <p:cNvSpPr>
+            <a:spLocks noGrp="1"/>
+          </p:cNvSpPr>
+          <p:nvPr>
+            <p:ph type="title"/>
+          </p:nvPr>
+        </p:nvSpPr>
+        <p:spPr/>
+        <p:txBody>
+          <a:bodyPr/>
+          <a:lstStyle/>
+          <a:p>
+            <a:endParaRPr lang="en-US"/>
+          </a:p>
+        </p:txBody>
+      </p:sp>
+      <mc:AlternateContent xmlns:mc="http://schemas.openxmlformats.org/markup-compatibility/2006">
+        <mc:Choice xmlns:a14="http://schemas.microsoft.com/office/drawing/2010/main" Requires="a14">
+          <p:sp>
+            <p:nvSpPr>
+              <p:cNvPr id="3" name="Content Placeholder 2">
+                <a:extLst>
+                  <a:ext uri="{FF2B5EF4-FFF2-40B4-BE49-F238E27FC236}">
+                    <a16:creationId xmlns:a16="http://schemas.microsoft.com/office/drawing/2014/main" id="{EBA10C89-B595-66CC-E92B-E9A580492C90}"/>
                   </a:ext>
                 </a:extLst>
               </p:cNvPr>
@@ -10579,13 +11939,13 @@
             </p:txBody>
           </p:sp>
         </mc:Choice>
-        <mc:Fallback xmlns="">
+        <mc:Fallback>
           <p:sp>
             <p:nvSpPr>
               <p:cNvPr id="3" name="Content Placeholder 2">
                 <a:extLst>
                   <a:ext uri="{FF2B5EF4-FFF2-40B4-BE49-F238E27FC236}">
-                    <a16:creationId xmlns:a16="http://schemas.microsoft.com/office/drawing/2014/main" id="{82B59FDF-DC83-4FCF-9381-C7F916A8C928}"/>
+                    <a16:creationId xmlns:a16="http://schemas.microsoft.com/office/drawing/2014/main" id="{EBA10C89-B595-66CC-E92B-E9A580492C90}"/>
                   </a:ext>
                 </a:extLst>
               </p:cNvPr>
@@ -10600,7 +11960,7 @@
               <a:blipFill>
                 <a:blip r:embed="rId2"/>
                 <a:stretch>
-                  <a:fillRect l="-667" t="-1111"/>
+                  <a:fillRect l="-500" t="-1111" r="-500"/>
                 </a:stretch>
               </a:blipFill>
             </p:spPr>
@@ -10622,7 +11982,7 @@
     </p:spTree>
     <p:extLst>
       <p:ext uri="{BB962C8B-B14F-4D97-AF65-F5344CB8AC3E}">
-        <p14:creationId xmlns:p14="http://schemas.microsoft.com/office/powerpoint/2010/main" val="3637747830"/>
+        <p14:creationId xmlns:p14="http://schemas.microsoft.com/office/powerpoint/2010/main" val="3333478716"/>
       </p:ext>
     </p:extLst>
   </p:cSld>
@@ -10809,7 +12169,467 @@
 </p:sld>
 </file>
 
-<file path=ppt/slides/slide15.xml><?xml version="1.0" encoding="utf-8"?>
+<file path=ppt/slides/slide2.xml><?xml version="1.0" encoding="utf-8"?>
+<p:sld xmlns:a="http://schemas.openxmlformats.org/drawingml/2006/main" xmlns:r="http://schemas.openxmlformats.org/officeDocument/2006/relationships" xmlns:p="http://schemas.openxmlformats.org/presentationml/2006/main">
+  <p:cSld>
+    <p:spTree>
+      <p:nvGrpSpPr>
+        <p:cNvPr id="1" name=""/>
+        <p:cNvGrpSpPr/>
+        <p:nvPr/>
+      </p:nvGrpSpPr>
+      <p:grpSpPr>
+        <a:xfrm>
+          <a:off x="0" y="0"/>
+          <a:ext cx="0" cy="0"/>
+          <a:chOff x="0" y="0"/>
+          <a:chExt cx="0" cy="0"/>
+        </a:xfrm>
+      </p:grpSpPr>
+      <p:sp>
+        <p:nvSpPr>
+          <p:cNvPr id="2" name="Title 1">
+            <a:extLst>
+              <a:ext uri="{FF2B5EF4-FFF2-40B4-BE49-F238E27FC236}">
+                <a16:creationId xmlns:a16="http://schemas.microsoft.com/office/drawing/2014/main" id="{1F97594D-2BD2-4BDC-96CE-8BB033766D0A}"/>
+              </a:ext>
+            </a:extLst>
+          </p:cNvPr>
+          <p:cNvSpPr>
+            <a:spLocks noGrp="1"/>
+          </p:cNvSpPr>
+          <p:nvPr>
+            <p:ph type="title"/>
+          </p:nvPr>
+        </p:nvSpPr>
+        <p:spPr/>
+        <p:txBody>
+          <a:bodyPr/>
+          <a:lstStyle/>
+          <a:p>
+            <a:r>
+              <a:rPr lang="en-US" dirty="0"/>
+              <a:t>Graph search strategies</a:t>
+            </a:r>
+          </a:p>
+        </p:txBody>
+      </p:sp>
+      <mc:AlternateContent xmlns:mc="http://schemas.openxmlformats.org/markup-compatibility/2006" xmlns:a14="http://schemas.microsoft.com/office/drawing/2010/main">
+        <mc:Choice Requires="a14">
+          <p:sp>
+            <p:nvSpPr>
+              <p:cNvPr id="3" name="Content Placeholder 2">
+                <a:extLst>
+                  <a:ext uri="{FF2B5EF4-FFF2-40B4-BE49-F238E27FC236}">
+                    <a16:creationId xmlns:a16="http://schemas.microsoft.com/office/drawing/2014/main" id="{B80D2780-410A-4A40-B4FA-12621CE548DC}"/>
+                  </a:ext>
+                </a:extLst>
+              </p:cNvPr>
+              <p:cNvSpPr>
+                <a:spLocks noGrp="1"/>
+              </p:cNvSpPr>
+              <p:nvPr>
+                <p:ph sz="quarter" idx="1"/>
+              </p:nvPr>
+            </p:nvSpPr>
+            <p:spPr/>
+            <p:txBody>
+              <a:bodyPr/>
+              <a:lstStyle/>
+              <a:p>
+                <a:r>
+                  <a:rPr lang="en-US" dirty="0"/>
+                  <a:t>How do we </a:t>
+                </a:r>
+              </a:p>
+              <a:p>
+                <a:pPr lvl="1"/>
+                <a:r>
+                  <a:rPr lang="en-US" dirty="0"/>
+                  <a:t>find a path to go from node </a:t>
+                </a:r>
+                <a14:m>
+                  <m:oMath xmlns:m="http://schemas.openxmlformats.org/officeDocument/2006/math">
+                    <m:r>
+                      <a:rPr lang="en-US" b="0" i="1" smtClean="0">
+                        <a:latin typeface="Cambria Math" panose="02040503050406030204" pitchFamily="18" charset="0"/>
+                      </a:rPr>
+                      <m:t>𝑢</m:t>
+                    </m:r>
+                    <m:r>
+                      <a:rPr lang="en-US" b="0" i="1" smtClean="0">
+                        <a:latin typeface="Cambria Math" panose="02040503050406030204" pitchFamily="18" charset="0"/>
+                      </a:rPr>
+                      <m:t> </m:t>
+                    </m:r>
+                  </m:oMath>
+                </a14:m>
+                <a:r>
+                  <a:rPr lang="en-US" dirty="0"/>
+                  <a:t>to node </a:t>
+                </a:r>
+                <a14:m>
+                  <m:oMath xmlns:m="http://schemas.openxmlformats.org/officeDocument/2006/math">
+                    <m:r>
+                      <a:rPr lang="en-US" b="0" i="1" smtClean="0">
+                        <a:latin typeface="Cambria Math" panose="02040503050406030204" pitchFamily="18" charset="0"/>
+                      </a:rPr>
+                      <m:t>𝑣</m:t>
+                    </m:r>
+                    <m:r>
+                      <a:rPr lang="en-US" i="1">
+                        <a:latin typeface="Cambria Math" panose="02040503050406030204" pitchFamily="18" charset="0"/>
+                      </a:rPr>
+                      <m:t> </m:t>
+                    </m:r>
+                  </m:oMath>
+                </a14:m>
+                <a:r>
+                  <a:rPr lang="en-US" dirty="0"/>
+                  <a:t>in the graph? </a:t>
+                </a:r>
+              </a:p>
+              <a:p>
+                <a:pPr lvl="1"/>
+                <a:r>
+                  <a:rPr lang="en-US" dirty="0"/>
+                  <a:t>check whether the graph is connected? </a:t>
+                </a:r>
+              </a:p>
+              <a:p>
+                <a:pPr lvl="1"/>
+                <a:r>
+                  <a:rPr lang="en-US" dirty="0"/>
+                  <a:t>compute how many connected components a graph has? </a:t>
+                </a:r>
+              </a:p>
+              <a:p>
+                <a:pPr lvl="1"/>
+                <a:endParaRPr lang="en-US" dirty="0"/>
+              </a:p>
+              <a:p>
+                <a:r>
+                  <a:rPr lang="en-US" dirty="0"/>
+                  <a:t>We want a graph search strategy </a:t>
+                </a:r>
+              </a:p>
+              <a:p>
+                <a:pPr lvl="1"/>
+                <a:r>
+                  <a:rPr lang="en-US" dirty="0"/>
+                  <a:t>which is a strategy to explore the graph systematically</a:t>
+                </a:r>
+              </a:p>
+              <a:p>
+                <a:pPr lvl="2"/>
+                <a:r>
+                  <a:rPr lang="en-US" dirty="0"/>
+                  <a:t>sometimes called a graph traversal strategy</a:t>
+                </a:r>
+              </a:p>
+              <a:p>
+                <a:pPr lvl="1"/>
+                <a:endParaRPr lang="en-US" dirty="0"/>
+              </a:p>
+              <a:p>
+                <a:r>
+                  <a:rPr lang="en-US" dirty="0"/>
+                  <a:t>Different graph search strategies have different properties</a:t>
+                </a:r>
+              </a:p>
+              <a:p>
+                <a:pPr lvl="1"/>
+                <a:r>
+                  <a:rPr lang="en-US" dirty="0" err="1"/>
+                  <a:t>e.g</a:t>
+                </a:r>
+                <a:r>
+                  <a:rPr lang="en-US" dirty="0"/>
+                  <a:t>, Breadth-first search (BFS) and Depth-first search (DFS)</a:t>
+                </a:r>
+              </a:p>
+              <a:p>
+                <a:pPr lvl="1"/>
+                <a:endParaRPr lang="en-US" dirty="0"/>
+              </a:p>
+            </p:txBody>
+          </p:sp>
+        </mc:Choice>
+        <mc:Fallback xmlns="">
+          <p:sp>
+            <p:nvSpPr>
+              <p:cNvPr id="3" name="Content Placeholder 2">
+                <a:extLst>
+                  <a:ext uri="{FF2B5EF4-FFF2-40B4-BE49-F238E27FC236}">
+                    <a16:creationId xmlns:a16="http://schemas.microsoft.com/office/drawing/2014/main" id="{B80D2780-410A-4A40-B4FA-12621CE548DC}"/>
+                  </a:ext>
+                </a:extLst>
+              </p:cNvPr>
+              <p:cNvSpPr>
+                <a:spLocks noGrp="1" noRot="1" noChangeAspect="1" noMove="1" noResize="1" noEditPoints="1" noAdjustHandles="1" noChangeArrowheads="1" noChangeShapeType="1" noTextEdit="1"/>
+              </p:cNvSpPr>
+              <p:nvPr>
+                <p:ph sz="quarter" idx="1"/>
+              </p:nvPr>
+            </p:nvSpPr>
+            <p:spPr>
+              <a:blipFill>
+                <a:blip r:embed="rId2"/>
+                <a:stretch>
+                  <a:fillRect l="-667" t="-1111" r="-815"/>
+                </a:stretch>
+              </a:blipFill>
+            </p:spPr>
+            <p:txBody>
+              <a:bodyPr/>
+              <a:lstStyle/>
+              <a:p>
+                <a:r>
+                  <a:rPr lang="en-US">
+                    <a:noFill/>
+                  </a:rPr>
+                  <a:t> </a:t>
+                </a:r>
+              </a:p>
+            </p:txBody>
+          </p:sp>
+        </mc:Fallback>
+      </mc:AlternateContent>
+    </p:spTree>
+    <p:extLst>
+      <p:ext uri="{BB962C8B-B14F-4D97-AF65-F5344CB8AC3E}">
+        <p14:creationId xmlns:p14="http://schemas.microsoft.com/office/powerpoint/2010/main" val="2788534547"/>
+      </p:ext>
+    </p:extLst>
+  </p:cSld>
+  <p:clrMapOvr>
+    <a:masterClrMapping/>
+  </p:clrMapOvr>
+  <p:timing>
+    <p:tnLst>
+      <p:par>
+        <p:cTn id="1" dur="indefinite" restart="never" nodeType="tmRoot">
+          <p:childTnLst>
+            <p:seq concurrent="1" nextAc="seek">
+              <p:cTn id="2" dur="indefinite" nodeType="mainSeq">
+                <p:childTnLst>
+                  <p:par>
+                    <p:cTn id="3" fill="hold">
+                      <p:stCondLst>
+                        <p:cond delay="indefinite"/>
+                      </p:stCondLst>
+                      <p:childTnLst>
+                        <p:par>
+                          <p:cTn id="4" fill="hold">
+                            <p:stCondLst>
+                              <p:cond delay="0"/>
+                            </p:stCondLst>
+                            <p:childTnLst>
+                              <p:par>
+                                <p:cTn id="5" presetID="1" presetClass="entr" presetSubtype="0" fill="hold" nodeType="clickEffect">
+                                  <p:stCondLst>
+                                    <p:cond delay="0"/>
+                                  </p:stCondLst>
+                                  <p:childTnLst>
+                                    <p:set>
+                                      <p:cBhvr>
+                                        <p:cTn id="6" dur="1" fill="hold">
+                                          <p:stCondLst>
+                                            <p:cond delay="0"/>
+                                          </p:stCondLst>
+                                        </p:cTn>
+                                        <p:tgtEl>
+                                          <p:spTgt spid="3">
+                                            <p:txEl>
+                                              <p:pRg st="5" end="5"/>
+                                            </p:txEl>
+                                          </p:spTgt>
+                                        </p:tgtEl>
+                                        <p:attrNameLst>
+                                          <p:attrName>style.visibility</p:attrName>
+                                        </p:attrNameLst>
+                                      </p:cBhvr>
+                                      <p:to>
+                                        <p:strVal val="visible"/>
+                                      </p:to>
+                                    </p:set>
+                                  </p:childTnLst>
+                                </p:cTn>
+                              </p:par>
+                              <p:par>
+                                <p:cTn id="7" presetID="1" presetClass="entr" presetSubtype="0" fill="hold" nodeType="withEffect">
+                                  <p:stCondLst>
+                                    <p:cond delay="0"/>
+                                  </p:stCondLst>
+                                  <p:childTnLst>
+                                    <p:set>
+                                      <p:cBhvr>
+                                        <p:cTn id="8" dur="1" fill="hold">
+                                          <p:stCondLst>
+                                            <p:cond delay="0"/>
+                                          </p:stCondLst>
+                                        </p:cTn>
+                                        <p:tgtEl>
+                                          <p:spTgt spid="3">
+                                            <p:txEl>
+                                              <p:pRg st="6" end="6"/>
+                                            </p:txEl>
+                                          </p:spTgt>
+                                        </p:tgtEl>
+                                        <p:attrNameLst>
+                                          <p:attrName>style.visibility</p:attrName>
+                                        </p:attrNameLst>
+                                      </p:cBhvr>
+                                      <p:to>
+                                        <p:strVal val="visible"/>
+                                      </p:to>
+                                    </p:set>
+                                  </p:childTnLst>
+                                </p:cTn>
+                              </p:par>
+                              <p:par>
+                                <p:cTn id="9" presetID="1" presetClass="entr" presetSubtype="0" fill="hold" nodeType="withEffect">
+                                  <p:stCondLst>
+                                    <p:cond delay="0"/>
+                                  </p:stCondLst>
+                                  <p:childTnLst>
+                                    <p:set>
+                                      <p:cBhvr>
+                                        <p:cTn id="10" dur="1" fill="hold">
+                                          <p:stCondLst>
+                                            <p:cond delay="0"/>
+                                          </p:stCondLst>
+                                        </p:cTn>
+                                        <p:tgtEl>
+                                          <p:spTgt spid="3">
+                                            <p:txEl>
+                                              <p:pRg st="7" end="7"/>
+                                            </p:txEl>
+                                          </p:spTgt>
+                                        </p:tgtEl>
+                                        <p:attrNameLst>
+                                          <p:attrName>style.visibility</p:attrName>
+                                        </p:attrNameLst>
+                                      </p:cBhvr>
+                                      <p:to>
+                                        <p:strVal val="visible"/>
+                                      </p:to>
+                                    </p:set>
+                                  </p:childTnLst>
+                                </p:cTn>
+                              </p:par>
+                            </p:childTnLst>
+                          </p:cTn>
+                        </p:par>
+                      </p:childTnLst>
+                    </p:cTn>
+                  </p:par>
+                  <p:par>
+                    <p:cTn id="11" fill="hold">
+                      <p:stCondLst>
+                        <p:cond delay="indefinite"/>
+                      </p:stCondLst>
+                      <p:childTnLst>
+                        <p:par>
+                          <p:cTn id="12" fill="hold">
+                            <p:stCondLst>
+                              <p:cond delay="0"/>
+                            </p:stCondLst>
+                            <p:childTnLst>
+                              <p:par>
+                                <p:cTn id="13" presetID="1" presetClass="entr" presetSubtype="0" fill="hold" nodeType="clickEffect">
+                                  <p:stCondLst>
+                                    <p:cond delay="0"/>
+                                  </p:stCondLst>
+                                  <p:childTnLst>
+                                    <p:set>
+                                      <p:cBhvr>
+                                        <p:cTn id="14" dur="1" fill="hold">
+                                          <p:stCondLst>
+                                            <p:cond delay="0"/>
+                                          </p:stCondLst>
+                                        </p:cTn>
+                                        <p:tgtEl>
+                                          <p:spTgt spid="3">
+                                            <p:txEl>
+                                              <p:pRg st="9" end="9"/>
+                                            </p:txEl>
+                                          </p:spTgt>
+                                        </p:tgtEl>
+                                        <p:attrNameLst>
+                                          <p:attrName>style.visibility</p:attrName>
+                                        </p:attrNameLst>
+                                      </p:cBhvr>
+                                      <p:to>
+                                        <p:strVal val="visible"/>
+                                      </p:to>
+                                    </p:set>
+                                  </p:childTnLst>
+                                </p:cTn>
+                              </p:par>
+                              <p:par>
+                                <p:cTn id="15" presetID="1" presetClass="entr" presetSubtype="0" fill="hold" nodeType="withEffect">
+                                  <p:stCondLst>
+                                    <p:cond delay="0"/>
+                                  </p:stCondLst>
+                                  <p:childTnLst>
+                                    <p:set>
+                                      <p:cBhvr>
+                                        <p:cTn id="16" dur="1" fill="hold">
+                                          <p:stCondLst>
+                                            <p:cond delay="0"/>
+                                          </p:stCondLst>
+                                        </p:cTn>
+                                        <p:tgtEl>
+                                          <p:spTgt spid="3">
+                                            <p:txEl>
+                                              <p:pRg st="10" end="10"/>
+                                            </p:txEl>
+                                          </p:spTgt>
+                                        </p:tgtEl>
+                                        <p:attrNameLst>
+                                          <p:attrName>style.visibility</p:attrName>
+                                        </p:attrNameLst>
+                                      </p:cBhvr>
+                                      <p:to>
+                                        <p:strVal val="visible"/>
+                                      </p:to>
+                                    </p:set>
+                                  </p:childTnLst>
+                                </p:cTn>
+                              </p:par>
+                            </p:childTnLst>
+                          </p:cTn>
+                        </p:par>
+                      </p:childTnLst>
+                    </p:cTn>
+                  </p:par>
+                </p:childTnLst>
+              </p:cTn>
+              <p:prevCondLst>
+                <p:cond evt="onPrev" delay="0">
+                  <p:tgtEl>
+                    <p:sldTgt/>
+                  </p:tgtEl>
+                </p:cond>
+              </p:prevCondLst>
+              <p:nextCondLst>
+                <p:cond evt="onNext" delay="0">
+                  <p:tgtEl>
+                    <p:sldTgt/>
+                  </p:tgtEl>
+                </p:cond>
+              </p:nextCondLst>
+            </p:seq>
+          </p:childTnLst>
+        </p:cTn>
+      </p:par>
+    </p:tnLst>
+  </p:timing>
+</p:sld>
+</file>
+
+<file path=ppt/slides/slide20.xml><?xml version="1.0" encoding="utf-8"?>
 <p:sld xmlns:a="http://schemas.openxmlformats.org/drawingml/2006/main" xmlns:r="http://schemas.openxmlformats.org/officeDocument/2006/relationships" xmlns:p="http://schemas.openxmlformats.org/presentationml/2006/main">
   <p:cSld>
     <p:spTree>
@@ -11339,7 +13159,7 @@
 </p:sld>
 </file>
 
-<file path=ppt/slides/slide16.xml><?xml version="1.0" encoding="utf-8"?>
+<file path=ppt/slides/slide21.xml><?xml version="1.0" encoding="utf-8"?>
 <p:sld xmlns:a="http://schemas.openxmlformats.org/drawingml/2006/main" xmlns:r="http://schemas.openxmlformats.org/officeDocument/2006/relationships" xmlns:p="http://schemas.openxmlformats.org/presentationml/2006/main">
   <p:cSld>
     <p:spTree>
@@ -12606,7 +14426,7 @@
 </p:sld>
 </file>
 
-<file path=ppt/slides/slide17.xml><?xml version="1.0" encoding="utf-8"?>
+<file path=ppt/slides/slide22.xml><?xml version="1.0" encoding="utf-8"?>
 <p:sld xmlns:a="http://schemas.openxmlformats.org/drawingml/2006/main" xmlns:r="http://schemas.openxmlformats.org/officeDocument/2006/relationships" xmlns:p="http://schemas.openxmlformats.org/presentationml/2006/main">
   <p:cSld>
     <p:spTree>
@@ -12859,7 +14679,7 @@
 </p:sld>
 </file>
 
-<file path=ppt/slides/slide18.xml><?xml version="1.0" encoding="utf-8"?>
+<file path=ppt/slides/slide23.xml><?xml version="1.0" encoding="utf-8"?>
 <p:sld xmlns:a="http://schemas.openxmlformats.org/drawingml/2006/main" xmlns:r="http://schemas.openxmlformats.org/officeDocument/2006/relationships" xmlns:p="http://schemas.openxmlformats.org/presentationml/2006/main">
   <p:cSld>
     <p:spTree>
@@ -13044,7 +14864,7 @@
 </p:sld>
 </file>
 
-<file path=ppt/slides/slide19.xml><?xml version="1.0" encoding="utf-8"?>
+<file path=ppt/slides/slide24.xml><?xml version="1.0" encoding="utf-8"?>
 <p:sld xmlns:a="http://schemas.openxmlformats.org/drawingml/2006/main" xmlns:r="http://schemas.openxmlformats.org/officeDocument/2006/relationships" xmlns:p="http://schemas.openxmlformats.org/presentationml/2006/main">
   <p:cSld>
     <p:spTree>
@@ -13273,7 +15093,7 @@
 </p:sld>
 </file>
 
-<file path=ppt/slides/slide2.xml><?xml version="1.0" encoding="utf-8"?>
+<file path=ppt/slides/slide25.xml><?xml version="1.0" encoding="utf-8"?>
 <p:sld xmlns:a="http://schemas.openxmlformats.org/drawingml/2006/main" xmlns:r="http://schemas.openxmlformats.org/officeDocument/2006/relationships" xmlns:p="http://schemas.openxmlformats.org/presentationml/2006/main">
   <p:cSld>
     <p:spTree>
@@ -13295,7 +15115,7 @@
           <p:cNvPr id="2" name="Title 1">
             <a:extLst>
               <a:ext uri="{FF2B5EF4-FFF2-40B4-BE49-F238E27FC236}">
-                <a16:creationId xmlns:a16="http://schemas.microsoft.com/office/drawing/2014/main" id="{1F97594D-2BD2-4BDC-96CE-8BB033766D0A}"/>
+                <a16:creationId xmlns:a16="http://schemas.microsoft.com/office/drawing/2014/main" id="{64E3A37B-4D94-44D3-B061-C2888EF74522}"/>
               </a:ext>
             </a:extLst>
           </p:cNvPr>
@@ -13313,196 +15133,85 @@
           <a:p>
             <a:r>
               <a:rPr lang="en-US" dirty="0"/>
-              <a:t>Graph search strategies</a:t>
+              <a:t>Time complexity for full-BFS</a:t>
             </a:r>
           </a:p>
         </p:txBody>
       </p:sp>
-      <mc:AlternateContent xmlns:mc="http://schemas.openxmlformats.org/markup-compatibility/2006" xmlns:a14="http://schemas.microsoft.com/office/drawing/2010/main">
-        <mc:Choice Requires="a14">
-          <p:sp>
-            <p:nvSpPr>
-              <p:cNvPr id="3" name="Content Placeholder 2">
-                <a:extLst>
-                  <a:ext uri="{FF2B5EF4-FFF2-40B4-BE49-F238E27FC236}">
-                    <a16:creationId xmlns:a16="http://schemas.microsoft.com/office/drawing/2014/main" id="{B80D2780-410A-4A40-B4FA-12621CE548DC}"/>
-                  </a:ext>
-                </a:extLst>
-              </p:cNvPr>
-              <p:cNvSpPr>
-                <a:spLocks noGrp="1"/>
-              </p:cNvSpPr>
-              <p:nvPr>
-                <p:ph sz="quarter" idx="1"/>
-              </p:nvPr>
-            </p:nvSpPr>
-            <p:spPr/>
-            <p:txBody>
-              <a:bodyPr/>
-              <a:lstStyle/>
-              <a:p>
-                <a:r>
-                  <a:rPr lang="en-US" dirty="0"/>
-                  <a:t>How do we </a:t>
-                </a:r>
-              </a:p>
-              <a:p>
-                <a:pPr lvl="1"/>
-                <a:r>
-                  <a:rPr lang="en-US" dirty="0"/>
-                  <a:t>find a path to go from node </a:t>
-                </a:r>
-                <a14:m>
-                  <m:oMath xmlns:m="http://schemas.openxmlformats.org/officeDocument/2006/math">
-                    <m:r>
-                      <a:rPr lang="en-US" b="0" i="1" smtClean="0">
-                        <a:latin typeface="Cambria Math" panose="02040503050406030204" pitchFamily="18" charset="0"/>
-                      </a:rPr>
-                      <m:t>𝑢</m:t>
-                    </m:r>
-                    <m:r>
-                      <a:rPr lang="en-US" b="0" i="1" smtClean="0">
-                        <a:latin typeface="Cambria Math" panose="02040503050406030204" pitchFamily="18" charset="0"/>
-                      </a:rPr>
-                      <m:t> </m:t>
-                    </m:r>
-                  </m:oMath>
-                </a14:m>
-                <a:r>
-                  <a:rPr lang="en-US" dirty="0"/>
-                  <a:t>to node </a:t>
-                </a:r>
-                <a14:m>
-                  <m:oMath xmlns:m="http://schemas.openxmlformats.org/officeDocument/2006/math">
-                    <m:r>
-                      <a:rPr lang="en-US" b="0" i="1" smtClean="0">
-                        <a:latin typeface="Cambria Math" panose="02040503050406030204" pitchFamily="18" charset="0"/>
-                      </a:rPr>
-                      <m:t>𝑣</m:t>
-                    </m:r>
-                    <m:r>
-                      <a:rPr lang="en-US" i="1">
-                        <a:latin typeface="Cambria Math" panose="02040503050406030204" pitchFamily="18" charset="0"/>
-                      </a:rPr>
-                      <m:t> </m:t>
-                    </m:r>
-                  </m:oMath>
-                </a14:m>
-                <a:r>
-                  <a:rPr lang="en-US" dirty="0"/>
-                  <a:t>in the graph? </a:t>
-                </a:r>
-              </a:p>
-              <a:p>
-                <a:pPr lvl="1"/>
-                <a:r>
-                  <a:rPr lang="en-US" dirty="0"/>
-                  <a:t>check whether the graph is connected? </a:t>
-                </a:r>
-              </a:p>
-              <a:p>
-                <a:pPr lvl="1"/>
-                <a:r>
-                  <a:rPr lang="en-US" dirty="0"/>
-                  <a:t>compute how many connected components a graph has? </a:t>
-                </a:r>
-              </a:p>
-              <a:p>
-                <a:pPr lvl="1"/>
-                <a:endParaRPr lang="en-US" dirty="0"/>
-              </a:p>
-              <a:p>
-                <a:r>
-                  <a:rPr lang="en-US" dirty="0"/>
-                  <a:t>We want a graph search strategy </a:t>
-                </a:r>
-              </a:p>
-              <a:p>
-                <a:pPr lvl="1"/>
-                <a:r>
-                  <a:rPr lang="en-US" dirty="0"/>
-                  <a:t>which is a strategy to explore the graph systematically</a:t>
-                </a:r>
-              </a:p>
-              <a:p>
-                <a:pPr lvl="2"/>
-                <a:r>
-                  <a:rPr lang="en-US" dirty="0"/>
-                  <a:t>sometimes called a graph traversal strategy</a:t>
-                </a:r>
-              </a:p>
-              <a:p>
-                <a:pPr lvl="1"/>
-                <a:endParaRPr lang="en-US" dirty="0"/>
-              </a:p>
-              <a:p>
-                <a:r>
-                  <a:rPr lang="en-US" dirty="0"/>
-                  <a:t>Different graph search strategies have different properties</a:t>
-                </a:r>
-              </a:p>
-              <a:p>
-                <a:pPr lvl="1"/>
-                <a:r>
-                  <a:rPr lang="en-US" dirty="0" err="1"/>
-                  <a:t>e.g</a:t>
-                </a:r>
-                <a:r>
-                  <a:rPr lang="en-US" dirty="0"/>
-                  <a:t>, Breadth-first search (BFS) and Depth-first search (DFS)</a:t>
-                </a:r>
-              </a:p>
-              <a:p>
-                <a:pPr lvl="1"/>
-                <a:endParaRPr lang="en-US" dirty="0"/>
-              </a:p>
-            </p:txBody>
-          </p:sp>
-        </mc:Choice>
-        <mc:Fallback xmlns="">
-          <p:sp>
-            <p:nvSpPr>
-              <p:cNvPr id="3" name="Content Placeholder 2">
-                <a:extLst>
-                  <a:ext uri="{FF2B5EF4-FFF2-40B4-BE49-F238E27FC236}">
-                    <a16:creationId xmlns:a16="http://schemas.microsoft.com/office/drawing/2014/main" id="{B80D2780-410A-4A40-B4FA-12621CE548DC}"/>
-                  </a:ext>
-                </a:extLst>
-              </p:cNvPr>
-              <p:cNvSpPr>
-                <a:spLocks noGrp="1" noRot="1" noChangeAspect="1" noMove="1" noResize="1" noEditPoints="1" noAdjustHandles="1" noChangeArrowheads="1" noChangeShapeType="1" noTextEdit="1"/>
-              </p:cNvSpPr>
-              <p:nvPr>
-                <p:ph sz="quarter" idx="1"/>
-              </p:nvPr>
-            </p:nvSpPr>
-            <p:spPr>
-              <a:blipFill>
-                <a:blip r:embed="rId2"/>
-                <a:stretch>
-                  <a:fillRect l="-667" t="-1111" r="-815"/>
-                </a:stretch>
-              </a:blipFill>
-            </p:spPr>
-            <p:txBody>
-              <a:bodyPr/>
-              <a:lstStyle/>
-              <a:p>
-                <a:r>
-                  <a:rPr lang="en-US">
-                    <a:noFill/>
-                  </a:rPr>
-                  <a:t> </a:t>
-                </a:r>
-              </a:p>
-            </p:txBody>
-          </p:sp>
-        </mc:Fallback>
-      </mc:AlternateContent>
+      <p:sp>
+        <p:nvSpPr>
+          <p:cNvPr id="3" name="Content Placeholder 2">
+            <a:extLst>
+              <a:ext uri="{FF2B5EF4-FFF2-40B4-BE49-F238E27FC236}">
+                <a16:creationId xmlns:a16="http://schemas.microsoft.com/office/drawing/2014/main" id="{F5A19B81-CA6F-4AB3-9299-6BA6891E1C4D}"/>
+              </a:ext>
+            </a:extLst>
+          </p:cNvPr>
+          <p:cNvSpPr>
+            <a:spLocks noGrp="1"/>
+          </p:cNvSpPr>
+          <p:nvPr>
+            <p:ph sz="quarter" idx="1"/>
+          </p:nvPr>
+        </p:nvSpPr>
+        <p:spPr>
+          <a:xfrm>
+            <a:off x="609600" y="1219200"/>
+            <a:ext cx="10972800" cy="5105400"/>
+          </a:xfrm>
+        </p:spPr>
+        <p:txBody>
+          <a:bodyPr/>
+          <a:lstStyle/>
+          <a:p>
+            <a:r>
+              <a:rPr lang="en-US" dirty="0"/>
+              <a:t>Each node can be added to the queue </a:t>
+            </a:r>
+            <a:r>
+              <a:rPr lang="en-US" dirty="0">
+                <a:solidFill>
+                  <a:srgbClr val="700000"/>
+                </a:solidFill>
+              </a:rPr>
+              <a:t>exactly once</a:t>
+            </a:r>
+          </a:p>
+          <a:p>
+            <a:r>
+              <a:rPr lang="en-US" dirty="0"/>
+              <a:t>Each edge will be explored </a:t>
+            </a:r>
+            <a:r>
+              <a:rPr lang="en-US" dirty="0">
+                <a:solidFill>
+                  <a:srgbClr val="700000"/>
+                </a:solidFill>
+              </a:rPr>
+              <a:t>exactly</a:t>
+            </a:r>
+            <a:r>
+              <a:rPr lang="en-US" dirty="0"/>
+              <a:t> 	</a:t>
+            </a:r>
+          </a:p>
+          <a:p>
+            <a:pPr lvl="2"/>
+            <a:endParaRPr lang="en-US" dirty="0"/>
+          </a:p>
+          <a:p>
+            <a:endParaRPr lang="en-US" dirty="0"/>
+          </a:p>
+          <a:p>
+            <a:pPr lvl="1"/>
+            <a:endParaRPr lang="en-US" dirty="0"/>
+          </a:p>
+        </p:txBody>
+      </p:sp>
     </p:spTree>
     <p:extLst>
       <p:ext uri="{BB962C8B-B14F-4D97-AF65-F5344CB8AC3E}">
-        <p14:creationId xmlns:p14="http://schemas.microsoft.com/office/powerpoint/2010/main" val="2788534547"/>
+        <p14:creationId xmlns:p14="http://schemas.microsoft.com/office/powerpoint/2010/main" val="2446136864"/>
       </p:ext>
     </p:extLst>
   </p:cSld>
@@ -13545,149 +15254,7 @@
                                         <p:tgtEl>
                                           <p:spTgt spid="3">
                                             <p:txEl>
-                                              <p:pRg st="5" end="5"/>
-                                            </p:txEl>
-                                          </p:spTgt>
-                                        </p:tgtEl>
-                                        <p:attrNameLst>
-                                          <p:attrName>style.visibility</p:attrName>
-                                        </p:attrNameLst>
-                                      </p:cBhvr>
-                                      <p:to>
-                                        <p:strVal val="visible"/>
-                                      </p:to>
-                                    </p:set>
-                                  </p:childTnLst>
-                                </p:cTn>
-                              </p:par>
-                              <p:par>
-                                <p:cTn id="7" presetID="1" presetClass="entr" presetSubtype="0" fill="hold" nodeType="withEffect">
-                                  <p:stCondLst>
-                                    <p:cond delay="0"/>
-                                  </p:stCondLst>
-                                  <p:childTnLst>
-                                    <p:set>
-                                      <p:cBhvr>
-                                        <p:cTn id="8" dur="1" fill="hold">
-                                          <p:stCondLst>
-                                            <p:cond delay="0"/>
-                                          </p:stCondLst>
-                                        </p:cTn>
-                                        <p:tgtEl>
-                                          <p:spTgt spid="3">
-                                            <p:txEl>
-                                              <p:pRg st="6" end="6"/>
-                                            </p:txEl>
-                                          </p:spTgt>
-                                        </p:tgtEl>
-                                        <p:attrNameLst>
-                                          <p:attrName>style.visibility</p:attrName>
-                                        </p:attrNameLst>
-                                      </p:cBhvr>
-                                      <p:to>
-                                        <p:strVal val="visible"/>
-                                      </p:to>
-                                    </p:set>
-                                  </p:childTnLst>
-                                </p:cTn>
-                              </p:par>
-                              <p:par>
-                                <p:cTn id="9" presetID="1" presetClass="entr" presetSubtype="0" fill="hold" nodeType="withEffect">
-                                  <p:stCondLst>
-                                    <p:cond delay="0"/>
-                                  </p:stCondLst>
-                                  <p:childTnLst>
-                                    <p:set>
-                                      <p:cBhvr>
-                                        <p:cTn id="10" dur="1" fill="hold">
-                                          <p:stCondLst>
-                                            <p:cond delay="0"/>
-                                          </p:stCondLst>
-                                        </p:cTn>
-                                        <p:tgtEl>
-                                          <p:spTgt spid="3">
-                                            <p:txEl>
-                                              <p:pRg st="7" end="7"/>
-                                            </p:txEl>
-                                          </p:spTgt>
-                                        </p:tgtEl>
-                                        <p:attrNameLst>
-                                          <p:attrName>style.visibility</p:attrName>
-                                        </p:attrNameLst>
-                                      </p:cBhvr>
-                                      <p:to>
-                                        <p:strVal val="visible"/>
-                                      </p:to>
-                                    </p:set>
-                                  </p:childTnLst>
-                                </p:cTn>
-                              </p:par>
-                            </p:childTnLst>
-                          </p:cTn>
-                        </p:par>
-                      </p:childTnLst>
-                    </p:cTn>
-                  </p:par>
-                  <p:par>
-                    <p:cTn id="11" fill="hold">
-                      <p:stCondLst>
-                        <p:cond delay="indefinite"/>
-                      </p:stCondLst>
-                      <p:childTnLst>
-                        <p:par>
-                          <p:cTn id="12" fill="hold">
-                            <p:stCondLst>
-                              <p:cond delay="0"/>
-                            </p:stCondLst>
-                            <p:childTnLst>
-                              <p:par>
-                                <p:cTn id="13" presetID="1" presetClass="entr" presetSubtype="0" fill="hold" nodeType="clickEffect">
-                                  <p:stCondLst>
-                                    <p:cond delay="0"/>
-                                  </p:stCondLst>
-                                  <p:childTnLst>
-                                    <p:set>
-                                      <p:cBhvr>
-                                        <p:cTn id="14" dur="1" fill="hold">
-                                          <p:stCondLst>
-                                            <p:cond delay="0"/>
-                                          </p:stCondLst>
-                                        </p:cTn>
-                                        <p:tgtEl>
-                                          <p:spTgt spid="3">
-                                            <p:txEl>
-                                              <p:pRg st="9" end="9"/>
-                                            </p:txEl>
-                                          </p:spTgt>
-                                        </p:tgtEl>
-                                        <p:attrNameLst>
-                                          <p:attrName>style.visibility</p:attrName>
-                                        </p:attrNameLst>
-                                      </p:cBhvr>
-                                      <p:to>
-                                        <p:strVal val="visible"/>
-                                      </p:to>
-                                    </p:set>
-                                  </p:childTnLst>
-                                </p:cTn>
-                              </p:par>
-                              <p:par>
-                                <p:cTn id="15" presetID="1" presetClass="entr" presetSubtype="0" fill="hold" nodeType="withEffect">
-                                  <p:stCondLst>
-                                    <p:cond delay="0"/>
-                                  </p:stCondLst>
-                                  <p:childTnLst>
-                                    <p:set>
-                                      <p:cBhvr>
-                                        <p:cTn id="16" dur="1" fill="hold">
-                                          <p:stCondLst>
-                                            <p:cond delay="0"/>
-                                          </p:stCondLst>
-                                        </p:cTn>
-                                        <p:tgtEl>
-                                          <p:spTgt spid="3">
-                                            <p:txEl>
-                                              <p:pRg st="10" end="10"/>
+                                              <p:pRg st="1" end="1"/>
                                             </p:txEl>
                                           </p:spTgt>
                                         </p:tgtEl>
@@ -13733,12 +15300,18 @@
 </p:sld>
 </file>
 
-<file path=ppt/slides/slide20.xml><?xml version="1.0" encoding="utf-8"?>
+<file path=ppt/slides/slide26.xml><?xml version="1.0" encoding="utf-8"?>
 <p:sld xmlns:a="http://schemas.openxmlformats.org/drawingml/2006/main" xmlns:r="http://schemas.openxmlformats.org/officeDocument/2006/relationships" xmlns:p="http://schemas.openxmlformats.org/presentationml/2006/main">
   <p:cSld>
     <p:spTree>
       <p:nvGrpSpPr>
-        <p:cNvPr id="1" name=""/>
+        <p:cNvPr id="1" name="">
+          <a:extLst>
+            <a:ext uri="{FF2B5EF4-FFF2-40B4-BE49-F238E27FC236}">
+              <a16:creationId xmlns:a16="http://schemas.microsoft.com/office/drawing/2014/main" id="{A9E6C251-6BB7-FFB6-FF2D-BAE8E86D8349}"/>
+            </a:ext>
+          </a:extLst>
+        </p:cNvPr>
         <p:cNvGrpSpPr/>
         <p:nvPr/>
       </p:nvGrpSpPr>
@@ -13755,7 +15328,7 @@
           <p:cNvPr id="2" name="Title 1">
             <a:extLst>
               <a:ext uri="{FF2B5EF4-FFF2-40B4-BE49-F238E27FC236}">
-                <a16:creationId xmlns:a16="http://schemas.microsoft.com/office/drawing/2014/main" id="{64E3A37B-4D94-44D3-B061-C2888EF74522}"/>
+                <a16:creationId xmlns:a16="http://schemas.microsoft.com/office/drawing/2014/main" id="{0C81C2CA-673A-99A5-57BF-F0C508693001}"/>
               </a:ext>
             </a:extLst>
           </p:cNvPr>
@@ -13778,14 +15351,490 @@
           </a:p>
         </p:txBody>
       </p:sp>
-      <mc:AlternateContent xmlns:mc="http://schemas.openxmlformats.org/markup-compatibility/2006" xmlns:a14="http://schemas.microsoft.com/office/drawing/2010/main">
-        <mc:Choice Requires="a14">
+      <mc:AlternateContent xmlns:mc="http://schemas.openxmlformats.org/markup-compatibility/2006">
+        <mc:Choice xmlns:a14="http://schemas.microsoft.com/office/drawing/2010/main" Requires="a14">
           <p:sp>
             <p:nvSpPr>
               <p:cNvPr id="3" name="Content Placeholder 2">
                 <a:extLst>
                   <a:ext uri="{FF2B5EF4-FFF2-40B4-BE49-F238E27FC236}">
-                    <a16:creationId xmlns:a16="http://schemas.microsoft.com/office/drawing/2014/main" id="{F5A19B81-CA6F-4AB3-9299-6BA6891E1C4D}"/>
+                    <a16:creationId xmlns:a16="http://schemas.microsoft.com/office/drawing/2014/main" id="{641FC86B-5127-0B10-7E9E-D0B62A79375A}"/>
+                  </a:ext>
+                </a:extLst>
+              </p:cNvPr>
+              <p:cNvSpPr>
+                <a:spLocks noGrp="1"/>
+              </p:cNvSpPr>
+              <p:nvPr>
+                <p:ph sz="quarter" idx="1"/>
+              </p:nvPr>
+            </p:nvSpPr>
+            <p:spPr>
+              <a:xfrm>
+                <a:off x="609600" y="1219200"/>
+                <a:ext cx="10972800" cy="5105400"/>
+              </a:xfrm>
+            </p:spPr>
+            <p:txBody>
+              <a:bodyPr/>
+              <a:lstStyle/>
+              <a:p>
+                <a:r>
+                  <a:rPr lang="en-US" dirty="0"/>
+                  <a:t>Each node can be added to the queue </a:t>
+                </a:r>
+                <a:r>
+                  <a:rPr lang="en-US" dirty="0">
+                    <a:solidFill>
+                      <a:srgbClr val="700000"/>
+                    </a:solidFill>
+                  </a:rPr>
+                  <a:t>exactly once</a:t>
+                </a:r>
+              </a:p>
+              <a:p>
+                <a:r>
+                  <a:rPr lang="en-US" dirty="0"/>
+                  <a:t>Each edge will be explored </a:t>
+                </a:r>
+                <a:r>
+                  <a:rPr lang="en-US" dirty="0">
+                    <a:solidFill>
+                      <a:srgbClr val="700000"/>
+                    </a:solidFill>
+                  </a:rPr>
+                  <a:t>exactly</a:t>
+                </a:r>
+                <a:r>
+                  <a:rPr lang="en-US" dirty="0"/>
+                  <a:t> 	</a:t>
+                </a:r>
+              </a:p>
+              <a:p>
+                <a:pPr lvl="1"/>
+                <a:r>
+                  <a:rPr lang="en-US" dirty="0">
+                    <a:solidFill>
+                      <a:srgbClr val="700000"/>
+                    </a:solidFill>
+                  </a:rPr>
+                  <a:t>twice</a:t>
+                </a:r>
+                <a:r>
+                  <a:rPr lang="en-US" dirty="0"/>
+                  <a:t> if the input is a undirected graph</a:t>
+                </a:r>
+              </a:p>
+              <a:p>
+                <a:pPr lvl="1"/>
+                <a:r>
+                  <a:rPr lang="en-US" dirty="0">
+                    <a:solidFill>
+                      <a:srgbClr val="700000"/>
+                    </a:solidFill>
+                  </a:rPr>
+                  <a:t>once</a:t>
+                </a:r>
+                <a:r>
+                  <a:rPr lang="en-US" dirty="0"/>
+                  <a:t> if the input is a directed graph</a:t>
+                </a:r>
+              </a:p>
+              <a:p>
+                <a:r>
+                  <a:rPr lang="en-US" dirty="0"/>
+                  <a:t>Initializing status takes </a:t>
+                </a:r>
+                <a14:m>
+                  <m:oMath xmlns:m="http://schemas.openxmlformats.org/officeDocument/2006/math">
+                    <m:r>
+                      <m:rPr>
+                        <m:sty m:val="p"/>
+                      </m:rPr>
+                      <a:rPr lang="en-US" b="0" i="0" smtClean="0">
+                        <a:latin typeface="Cambria Math" panose="02040503050406030204" pitchFamily="18" charset="0"/>
+                      </a:rPr>
+                      <m:t>Θ</m:t>
+                    </m:r>
+                    <m:r>
+                      <a:rPr lang="en-US" b="0" i="1" smtClean="0">
+                        <a:latin typeface="Cambria Math" panose="02040503050406030204" pitchFamily="18" charset="0"/>
+                      </a:rPr>
+                      <m:t>(</m:t>
+                    </m:r>
+                    <m:d>
+                      <m:dPr>
+                        <m:begChr m:val="|"/>
+                        <m:endChr m:val="|"/>
+                        <m:ctrlPr>
+                          <a:rPr lang="en-US" b="0" i="1" smtClean="0">
+                            <a:latin typeface="Cambria Math" panose="02040503050406030204" pitchFamily="18" charset="0"/>
+                          </a:rPr>
+                        </m:ctrlPr>
+                      </m:dPr>
+                      <m:e>
+                        <m:r>
+                          <a:rPr lang="en-US" b="0" i="1" smtClean="0">
+                            <a:latin typeface="Cambria Math" panose="02040503050406030204" pitchFamily="18" charset="0"/>
+                          </a:rPr>
+                          <m:t>𝑉</m:t>
+                        </m:r>
+                      </m:e>
+                    </m:d>
+                    <m:r>
+                      <a:rPr lang="en-US" b="0" i="1" smtClean="0">
+                        <a:latin typeface="Cambria Math" panose="02040503050406030204" pitchFamily="18" charset="0"/>
+                      </a:rPr>
+                      <m:t>)</m:t>
+                    </m:r>
+                  </m:oMath>
+                </a14:m>
+                <a:r>
+                  <a:rPr lang="en-US" dirty="0"/>
+                  <a:t> time at the beginning</a:t>
+                </a:r>
+              </a:p>
+              <a:p>
+                <a:endParaRPr lang="en-US" dirty="0"/>
+              </a:p>
+              <a:p>
+                <a:pPr lvl="2"/>
+                <a:endParaRPr lang="en-US" dirty="0"/>
+              </a:p>
+              <a:p>
+                <a:endParaRPr lang="en-US" dirty="0"/>
+              </a:p>
+              <a:p>
+                <a:pPr lvl="1"/>
+                <a:endParaRPr lang="en-US" dirty="0"/>
+              </a:p>
+            </p:txBody>
+          </p:sp>
+        </mc:Choice>
+        <mc:Fallback>
+          <p:sp>
+            <p:nvSpPr>
+              <p:cNvPr id="3" name="Content Placeholder 2">
+                <a:extLst>
+                  <a:ext uri="{FF2B5EF4-FFF2-40B4-BE49-F238E27FC236}">
+                    <a16:creationId xmlns:a16="http://schemas.microsoft.com/office/drawing/2014/main" id="{641FC86B-5127-0B10-7E9E-D0B62A79375A}"/>
+                  </a:ext>
+                </a:extLst>
+              </p:cNvPr>
+              <p:cNvSpPr>
+                <a:spLocks noGrp="1" noRot="1" noChangeAspect="1" noMove="1" noResize="1" noEditPoints="1" noAdjustHandles="1" noChangeArrowheads="1" noChangeShapeType="1" noTextEdit="1"/>
+              </p:cNvSpPr>
+              <p:nvPr>
+                <p:ph sz="quarter" idx="1"/>
+              </p:nvPr>
+            </p:nvSpPr>
+            <p:spPr>
+              <a:xfrm>
+                <a:off x="609600" y="1219200"/>
+                <a:ext cx="10972800" cy="5105400"/>
+              </a:xfrm>
+              <a:blipFill>
+                <a:blip r:embed="rId2"/>
+                <a:stretch>
+                  <a:fillRect l="-500" t="-1074"/>
+                </a:stretch>
+              </a:blipFill>
+            </p:spPr>
+            <p:txBody>
+              <a:bodyPr/>
+              <a:lstStyle/>
+              <a:p>
+                <a:r>
+                  <a:rPr lang="en-US">
+                    <a:noFill/>
+                  </a:rPr>
+                  <a:t> </a:t>
+                </a:r>
+              </a:p>
+            </p:txBody>
+          </p:sp>
+        </mc:Fallback>
+      </mc:AlternateContent>
+    </p:spTree>
+    <p:extLst>
+      <p:ext uri="{BB962C8B-B14F-4D97-AF65-F5344CB8AC3E}">
+        <p14:creationId xmlns:p14="http://schemas.microsoft.com/office/powerpoint/2010/main" val="4068145114"/>
+      </p:ext>
+    </p:extLst>
+  </p:cSld>
+  <p:clrMapOvr>
+    <a:masterClrMapping/>
+  </p:clrMapOvr>
+  <p:timing>
+    <p:tnLst>
+      <p:par>
+        <p:cTn id="1" dur="indefinite" restart="never" nodeType="tmRoot">
+          <p:childTnLst>
+            <p:seq concurrent="1" nextAc="seek">
+              <p:cTn id="2" dur="indefinite" nodeType="mainSeq">
+                <p:childTnLst>
+                  <p:par>
+                    <p:cTn id="3" fill="hold">
+                      <p:stCondLst>
+                        <p:cond delay="indefinite"/>
+                      </p:stCondLst>
+                      <p:childTnLst>
+                        <p:par>
+                          <p:cTn id="4" fill="hold">
+                            <p:stCondLst>
+                              <p:cond delay="0"/>
+                            </p:stCondLst>
+                            <p:childTnLst>
+                              <p:par>
+                                <p:cTn id="5" presetID="1" presetClass="entr" presetSubtype="0" fill="hold" nodeType="clickEffect">
+                                  <p:stCondLst>
+                                    <p:cond delay="0"/>
+                                  </p:stCondLst>
+                                  <p:childTnLst>
+                                    <p:set>
+                                      <p:cBhvr>
+                                        <p:cTn id="6" dur="1" fill="hold">
+                                          <p:stCondLst>
+                                            <p:cond delay="0"/>
+                                          </p:stCondLst>
+                                        </p:cTn>
+                                        <p:tgtEl>
+                                          <p:spTgt spid="3">
+                                            <p:txEl>
+                                              <p:pRg st="1" end="1"/>
+                                            </p:txEl>
+                                          </p:spTgt>
+                                        </p:tgtEl>
+                                        <p:attrNameLst>
+                                          <p:attrName>style.visibility</p:attrName>
+                                        </p:attrNameLst>
+                                      </p:cBhvr>
+                                      <p:to>
+                                        <p:strVal val="visible"/>
+                                      </p:to>
+                                    </p:set>
+                                  </p:childTnLst>
+                                </p:cTn>
+                              </p:par>
+                            </p:childTnLst>
+                          </p:cTn>
+                        </p:par>
+                      </p:childTnLst>
+                    </p:cTn>
+                  </p:par>
+                  <p:par>
+                    <p:cTn id="7" fill="hold">
+                      <p:stCondLst>
+                        <p:cond delay="indefinite"/>
+                      </p:stCondLst>
+                      <p:childTnLst>
+                        <p:par>
+                          <p:cTn id="8" fill="hold">
+                            <p:stCondLst>
+                              <p:cond delay="0"/>
+                            </p:stCondLst>
+                            <p:childTnLst>
+                              <p:par>
+                                <p:cTn id="9" presetID="1" presetClass="entr" presetSubtype="0" fill="hold" nodeType="clickEffect">
+                                  <p:stCondLst>
+                                    <p:cond delay="0"/>
+                                  </p:stCondLst>
+                                  <p:childTnLst>
+                                    <p:set>
+                                      <p:cBhvr>
+                                        <p:cTn id="10" dur="1" fill="hold">
+                                          <p:stCondLst>
+                                            <p:cond delay="0"/>
+                                          </p:stCondLst>
+                                        </p:cTn>
+                                        <p:tgtEl>
+                                          <p:spTgt spid="3">
+                                            <p:txEl>
+                                              <p:pRg st="2" end="2"/>
+                                            </p:txEl>
+                                          </p:spTgt>
+                                        </p:tgtEl>
+                                        <p:attrNameLst>
+                                          <p:attrName>style.visibility</p:attrName>
+                                        </p:attrNameLst>
+                                      </p:cBhvr>
+                                      <p:to>
+                                        <p:strVal val="visible"/>
+                                      </p:to>
+                                    </p:set>
+                                  </p:childTnLst>
+                                </p:cTn>
+                              </p:par>
+                              <p:par>
+                                <p:cTn id="11" presetID="1" presetClass="entr" presetSubtype="0" fill="hold" nodeType="withEffect">
+                                  <p:stCondLst>
+                                    <p:cond delay="0"/>
+                                  </p:stCondLst>
+                                  <p:childTnLst>
+                                    <p:set>
+                                      <p:cBhvr>
+                                        <p:cTn id="12" dur="1" fill="hold">
+                                          <p:stCondLst>
+                                            <p:cond delay="0"/>
+                                          </p:stCondLst>
+                                        </p:cTn>
+                                        <p:tgtEl>
+                                          <p:spTgt spid="3">
+                                            <p:txEl>
+                                              <p:pRg st="3" end="3"/>
+                                            </p:txEl>
+                                          </p:spTgt>
+                                        </p:tgtEl>
+                                        <p:attrNameLst>
+                                          <p:attrName>style.visibility</p:attrName>
+                                        </p:attrNameLst>
+                                      </p:cBhvr>
+                                      <p:to>
+                                        <p:strVal val="visible"/>
+                                      </p:to>
+                                    </p:set>
+                                  </p:childTnLst>
+                                </p:cTn>
+                              </p:par>
+                            </p:childTnLst>
+                          </p:cTn>
+                        </p:par>
+                      </p:childTnLst>
+                    </p:cTn>
+                  </p:par>
+                  <p:par>
+                    <p:cTn id="13" fill="hold">
+                      <p:stCondLst>
+                        <p:cond delay="indefinite"/>
+                      </p:stCondLst>
+                      <p:childTnLst>
+                        <p:par>
+                          <p:cTn id="14" fill="hold">
+                            <p:stCondLst>
+                              <p:cond delay="0"/>
+                            </p:stCondLst>
+                            <p:childTnLst>
+                              <p:par>
+                                <p:cTn id="15" presetID="1" presetClass="entr" presetSubtype="0" fill="hold" nodeType="clickEffect">
+                                  <p:stCondLst>
+                                    <p:cond delay="0"/>
+                                  </p:stCondLst>
+                                  <p:childTnLst>
+                                    <p:set>
+                                      <p:cBhvr>
+                                        <p:cTn id="16" dur="1" fill="hold">
+                                          <p:stCondLst>
+                                            <p:cond delay="0"/>
+                                          </p:stCondLst>
+                                        </p:cTn>
+                                        <p:tgtEl>
+                                          <p:spTgt spid="3">
+                                            <p:txEl>
+                                              <p:pRg st="4" end="4"/>
+                                            </p:txEl>
+                                          </p:spTgt>
+                                        </p:tgtEl>
+                                        <p:attrNameLst>
+                                          <p:attrName>style.visibility</p:attrName>
+                                        </p:attrNameLst>
+                                      </p:cBhvr>
+                                      <p:to>
+                                        <p:strVal val="visible"/>
+                                      </p:to>
+                                    </p:set>
+                                  </p:childTnLst>
+                                </p:cTn>
+                              </p:par>
+                            </p:childTnLst>
+                          </p:cTn>
+                        </p:par>
+                      </p:childTnLst>
+                    </p:cTn>
+                  </p:par>
+                </p:childTnLst>
+              </p:cTn>
+              <p:prevCondLst>
+                <p:cond evt="onPrev" delay="0">
+                  <p:tgtEl>
+                    <p:sldTgt/>
+                  </p:tgtEl>
+                </p:cond>
+              </p:prevCondLst>
+              <p:nextCondLst>
+                <p:cond evt="onNext" delay="0">
+                  <p:tgtEl>
+                    <p:sldTgt/>
+                  </p:tgtEl>
+                </p:cond>
+              </p:nextCondLst>
+            </p:seq>
+          </p:childTnLst>
+        </p:cTn>
+      </p:par>
+    </p:tnLst>
+  </p:timing>
+</p:sld>
+</file>
+
+<file path=ppt/slides/slide27.xml><?xml version="1.0" encoding="utf-8"?>
+<p:sld xmlns:a="http://schemas.openxmlformats.org/drawingml/2006/main" xmlns:r="http://schemas.openxmlformats.org/officeDocument/2006/relationships" xmlns:p="http://schemas.openxmlformats.org/presentationml/2006/main">
+  <p:cSld>
+    <p:spTree>
+      <p:nvGrpSpPr>
+        <p:cNvPr id="1" name="">
+          <a:extLst>
+            <a:ext uri="{FF2B5EF4-FFF2-40B4-BE49-F238E27FC236}">
+              <a16:creationId xmlns:a16="http://schemas.microsoft.com/office/drawing/2014/main" id="{F0B43FE3-46BC-6D54-700A-E01E3890DDF4}"/>
+            </a:ext>
+          </a:extLst>
+        </p:cNvPr>
+        <p:cNvGrpSpPr/>
+        <p:nvPr/>
+      </p:nvGrpSpPr>
+      <p:grpSpPr>
+        <a:xfrm>
+          <a:off x="0" y="0"/>
+          <a:ext cx="0" cy="0"/>
+          <a:chOff x="0" y="0"/>
+          <a:chExt cx="0" cy="0"/>
+        </a:xfrm>
+      </p:grpSpPr>
+      <p:sp>
+        <p:nvSpPr>
+          <p:cNvPr id="2" name="Title 1">
+            <a:extLst>
+              <a:ext uri="{FF2B5EF4-FFF2-40B4-BE49-F238E27FC236}">
+                <a16:creationId xmlns:a16="http://schemas.microsoft.com/office/drawing/2014/main" id="{F3F76BFB-A782-5DF2-A904-601A8B77E8DF}"/>
+              </a:ext>
+            </a:extLst>
+          </p:cNvPr>
+          <p:cNvSpPr>
+            <a:spLocks noGrp="1"/>
+          </p:cNvSpPr>
+          <p:nvPr>
+            <p:ph type="title"/>
+          </p:nvPr>
+        </p:nvSpPr>
+        <p:spPr/>
+        <p:txBody>
+          <a:bodyPr/>
+          <a:lstStyle/>
+          <a:p>
+            <a:r>
+              <a:rPr lang="en-US" dirty="0"/>
+              <a:t>Time complexity for full-BFS</a:t>
+            </a:r>
+          </a:p>
+        </p:txBody>
+      </p:sp>
+      <mc:AlternateContent xmlns:mc="http://schemas.openxmlformats.org/markup-compatibility/2006">
+        <mc:Choice xmlns:a14="http://schemas.microsoft.com/office/drawing/2010/main" Requires="a14">
+          <p:sp>
+            <p:nvSpPr>
+              <p:cNvPr id="3" name="Content Placeholder 2">
+                <a:extLst>
+                  <a:ext uri="{FF2B5EF4-FFF2-40B4-BE49-F238E27FC236}">
+                    <a16:creationId xmlns:a16="http://schemas.microsoft.com/office/drawing/2014/main" id="{343C33D1-96EA-5AF3-3773-0E0E79789506}"/>
                   </a:ext>
                 </a:extLst>
               </p:cNvPr>
@@ -14240,13 +16289,13 @@
             </p:txBody>
           </p:sp>
         </mc:Choice>
-        <mc:Fallback xmlns="">
+        <mc:Fallback>
           <p:sp>
             <p:nvSpPr>
               <p:cNvPr id="3" name="Content Placeholder 2">
                 <a:extLst>
                   <a:ext uri="{FF2B5EF4-FFF2-40B4-BE49-F238E27FC236}">
-                    <a16:creationId xmlns:a16="http://schemas.microsoft.com/office/drawing/2014/main" id="{F5A19B81-CA6F-4AB3-9299-6BA6891E1C4D}"/>
+                    <a16:creationId xmlns:a16="http://schemas.microsoft.com/office/drawing/2014/main" id="{343C33D1-96EA-5AF3-3773-0E0E79789506}"/>
                   </a:ext>
                 </a:extLst>
               </p:cNvPr>
@@ -14287,7 +16336,7 @@
     </p:spTree>
     <p:extLst>
       <p:ext uri="{BB962C8B-B14F-4D97-AF65-F5344CB8AC3E}">
-        <p14:creationId xmlns:p14="http://schemas.microsoft.com/office/powerpoint/2010/main" val="2446136864"/>
+        <p14:creationId xmlns:p14="http://schemas.microsoft.com/office/powerpoint/2010/main" val="1474244258"/>
       </p:ext>
     </p:extLst>
   </p:cSld>
@@ -14665,7 +16714,7 @@
 </p:sld>
 </file>
 
-<file path=ppt/slides/slide21.xml><?xml version="1.0" encoding="utf-8"?>
+<file path=ppt/slides/slide28.xml><?xml version="1.0" encoding="utf-8"?>
 <p:sld xmlns:a="http://schemas.openxmlformats.org/drawingml/2006/main" xmlns:r="http://schemas.openxmlformats.org/officeDocument/2006/relationships" xmlns:p="http://schemas.openxmlformats.org/presentationml/2006/main">
   <p:cSld>
     <p:spTree>
@@ -14707,8 +16756,8 @@
           </a:p>
         </p:txBody>
       </p:sp>
-      <mc:AlternateContent xmlns:mc="http://schemas.openxmlformats.org/markup-compatibility/2006" xmlns:a14="http://schemas.microsoft.com/office/drawing/2010/main">
-        <mc:Choice Requires="a14">
+      <mc:AlternateContent xmlns:mc="http://schemas.openxmlformats.org/markup-compatibility/2006">
+        <mc:Choice xmlns:a14="http://schemas.microsoft.com/office/drawing/2010/main" Requires="a14">
           <p:sp>
             <p:nvSpPr>
               <p:cNvPr id="3" name="Content Placeholder 2">
@@ -14810,8 +16859,12 @@
                 </a14:m>
                 <a:r>
                   <a:rPr lang="en-US" dirty="0"/>
-                  <a:t> is the size needed to even represent input graph. </a:t>
+                  <a:t> is the size needed to even represent input graph.  </a:t>
                 </a:r>
+              </a:p>
+              <a:p>
+                <a:pPr lvl="1"/>
+                <a:endParaRPr lang="en-US" dirty="0"/>
               </a:p>
               <a:p>
                 <a:pPr lvl="1"/>
@@ -14823,7 +16876,7 @@
             </p:txBody>
           </p:sp>
         </mc:Choice>
-        <mc:Fallback xmlns="">
+        <mc:Fallback>
           <p:sp>
             <p:nvSpPr>
               <p:cNvPr id="3" name="Content Placeholder 2">
@@ -14844,7 +16897,7 @@
               <a:blipFill>
                 <a:blip r:embed="rId2"/>
                 <a:stretch>
-                  <a:fillRect l="-667" t="-1111"/>
+                  <a:fillRect l="-500" t="-1111" r="-444"/>
                 </a:stretch>
               </a:blipFill>
             </p:spPr>
@@ -14876,7 +16929,827 @@
 </p:sld>
 </file>
 
-<file path=ppt/slides/slide22.xml><?xml version="1.0" encoding="utf-8"?>
+<file path=ppt/slides/slide29.xml><?xml version="1.0" encoding="utf-8"?>
+<p:sld xmlns:a="http://schemas.openxmlformats.org/drawingml/2006/main" xmlns:r="http://schemas.openxmlformats.org/officeDocument/2006/relationships" xmlns:p="http://schemas.openxmlformats.org/presentationml/2006/main">
+  <p:cSld>
+    <p:spTree>
+      <p:nvGrpSpPr>
+        <p:cNvPr id="1" name="">
+          <a:extLst>
+            <a:ext uri="{FF2B5EF4-FFF2-40B4-BE49-F238E27FC236}">
+              <a16:creationId xmlns:a16="http://schemas.microsoft.com/office/drawing/2014/main" id="{97E263F0-BCB1-293C-6D5F-E95FBFAA5198}"/>
+            </a:ext>
+          </a:extLst>
+        </p:cNvPr>
+        <p:cNvGrpSpPr/>
+        <p:nvPr/>
+      </p:nvGrpSpPr>
+      <p:grpSpPr>
+        <a:xfrm>
+          <a:off x="0" y="0"/>
+          <a:ext cx="0" cy="0"/>
+          <a:chOff x="0" y="0"/>
+          <a:chExt cx="0" cy="0"/>
+        </a:xfrm>
+      </p:grpSpPr>
+      <p:sp>
+        <p:nvSpPr>
+          <p:cNvPr id="2" name="Title 1">
+            <a:extLst>
+              <a:ext uri="{FF2B5EF4-FFF2-40B4-BE49-F238E27FC236}">
+                <a16:creationId xmlns:a16="http://schemas.microsoft.com/office/drawing/2014/main" id="{BC7CB518-9432-E154-2EA9-27279D62F559}"/>
+              </a:ext>
+            </a:extLst>
+          </p:cNvPr>
+          <p:cNvSpPr>
+            <a:spLocks noGrp="1"/>
+          </p:cNvSpPr>
+          <p:nvPr>
+            <p:ph type="title"/>
+          </p:nvPr>
+        </p:nvSpPr>
+        <p:spPr/>
+        <p:txBody>
+          <a:bodyPr/>
+          <a:lstStyle/>
+          <a:p>
+            <a:endParaRPr lang="en-US"/>
+          </a:p>
+        </p:txBody>
+      </p:sp>
+      <mc:AlternateContent xmlns:mc="http://schemas.openxmlformats.org/markup-compatibility/2006">
+        <mc:Choice xmlns:a14="http://schemas.microsoft.com/office/drawing/2010/main" Requires="a14">
+          <p:sp>
+            <p:nvSpPr>
+              <p:cNvPr id="3" name="Content Placeholder 2">
+                <a:extLst>
+                  <a:ext uri="{FF2B5EF4-FFF2-40B4-BE49-F238E27FC236}">
+                    <a16:creationId xmlns:a16="http://schemas.microsoft.com/office/drawing/2014/main" id="{60CE6A08-0283-78F9-BFDA-4FBE0725F079}"/>
+                  </a:ext>
+                </a:extLst>
+              </p:cNvPr>
+              <p:cNvSpPr>
+                <a:spLocks noGrp="1"/>
+              </p:cNvSpPr>
+              <p:nvPr>
+                <p:ph sz="quarter" idx="1"/>
+              </p:nvPr>
+            </p:nvSpPr>
+            <p:spPr/>
+            <p:txBody>
+              <a:bodyPr/>
+              <a:lstStyle/>
+              <a:p>
+                <a:r>
+                  <a:rPr lang="en-US" dirty="0"/>
+                  <a:t>As a graph traversal strategy (namely we want to have a way to systematically visit all nodes in the graph)</a:t>
+                </a:r>
+              </a:p>
+              <a:p>
+                <a:pPr lvl="1"/>
+                <a:r>
+                  <a:rPr lang="en-US" dirty="0"/>
+                  <a:t>The time complexity is </a:t>
+                </a:r>
+                <a:r>
+                  <a:rPr lang="en-US" dirty="0">
+                    <a:solidFill>
+                      <a:srgbClr val="C00000"/>
+                    </a:solidFill>
+                  </a:rPr>
+                  <a:t>optimal</a:t>
+                </a:r>
+                <a:r>
+                  <a:rPr lang="en-US" dirty="0"/>
+                  <a:t> </a:t>
+                </a:r>
+              </a:p>
+              <a:p>
+                <a:pPr lvl="1"/>
+                <a:r>
+                  <a:rPr lang="en-US" dirty="0"/>
+                  <a:t>as </a:t>
+                </a:r>
+                <a14:m>
+                  <m:oMath xmlns:m="http://schemas.openxmlformats.org/officeDocument/2006/math">
+                    <m:d>
+                      <m:dPr>
+                        <m:begChr m:val="|"/>
+                        <m:endChr m:val="|"/>
+                        <m:ctrlPr>
+                          <a:rPr lang="en-US" b="0" i="1" smtClean="0">
+                            <a:latin typeface="Cambria Math" panose="02040503050406030204" pitchFamily="18" charset="0"/>
+                          </a:rPr>
+                        </m:ctrlPr>
+                      </m:dPr>
+                      <m:e>
+                        <m:r>
+                          <a:rPr lang="en-US" b="0" i="1" smtClean="0">
+                            <a:latin typeface="Cambria Math" panose="02040503050406030204" pitchFamily="18" charset="0"/>
+                          </a:rPr>
+                          <m:t>𝑉</m:t>
+                        </m:r>
+                      </m:e>
+                    </m:d>
+                    <m:r>
+                      <a:rPr lang="en-US" b="0" i="1" smtClean="0">
+                        <a:latin typeface="Cambria Math" panose="02040503050406030204" pitchFamily="18" charset="0"/>
+                      </a:rPr>
+                      <m:t>+</m:t>
+                    </m:r>
+                    <m:d>
+                      <m:dPr>
+                        <m:begChr m:val="|"/>
+                        <m:endChr m:val="|"/>
+                        <m:ctrlPr>
+                          <a:rPr lang="en-US" b="0" i="1" smtClean="0">
+                            <a:latin typeface="Cambria Math" panose="02040503050406030204" pitchFamily="18" charset="0"/>
+                          </a:rPr>
+                        </m:ctrlPr>
+                      </m:dPr>
+                      <m:e>
+                        <m:r>
+                          <a:rPr lang="en-US" b="0" i="1" smtClean="0">
+                            <a:latin typeface="Cambria Math" panose="02040503050406030204" pitchFamily="18" charset="0"/>
+                          </a:rPr>
+                          <m:t>𝐸</m:t>
+                        </m:r>
+                      </m:e>
+                    </m:d>
+                  </m:oMath>
+                </a14:m>
+                <a:r>
+                  <a:rPr lang="en-US" dirty="0"/>
+                  <a:t> is the size needed to even represent input graph.  </a:t>
+                </a:r>
+              </a:p>
+              <a:p>
+                <a:pPr lvl="1"/>
+                <a:endParaRPr lang="en-US" dirty="0"/>
+              </a:p>
+              <a:p>
+                <a:r>
+                  <a:rPr lang="en-US" dirty="0"/>
+                  <a:t>If we know </a:t>
+                </a:r>
+                <a14:m>
+                  <m:oMath xmlns:m="http://schemas.openxmlformats.org/officeDocument/2006/math">
+                    <m:d>
+                      <m:dPr>
+                        <m:begChr m:val="|"/>
+                        <m:endChr m:val="|"/>
+                        <m:ctrlPr>
+                          <a:rPr lang="en-US" b="0" i="1" smtClean="0">
+                            <a:latin typeface="Cambria Math" panose="02040503050406030204" pitchFamily="18" charset="0"/>
+                          </a:rPr>
+                        </m:ctrlPr>
+                      </m:dPr>
+                      <m:e>
+                        <m:r>
+                          <a:rPr lang="en-US" b="0" i="1" smtClean="0">
+                            <a:latin typeface="Cambria Math" panose="02040503050406030204" pitchFamily="18" charset="0"/>
+                          </a:rPr>
+                          <m:t>𝐸</m:t>
+                        </m:r>
+                      </m:e>
+                    </m:d>
+                    <m:r>
+                      <a:rPr lang="en-US" b="0" i="1" smtClean="0">
+                        <a:latin typeface="Cambria Math" panose="02040503050406030204" pitchFamily="18" charset="0"/>
+                      </a:rPr>
+                      <m:t>=</m:t>
+                    </m:r>
+                    <m:r>
+                      <a:rPr lang="en-US" b="0" i="1" smtClean="0">
+                        <a:latin typeface="Cambria Math" panose="02040503050406030204" pitchFamily="18" charset="0"/>
+                      </a:rPr>
+                      <m:t>𝑂</m:t>
+                    </m:r>
+                    <m:d>
+                      <m:dPr>
+                        <m:ctrlPr>
+                          <a:rPr lang="en-US" b="0" i="1" smtClean="0">
+                            <a:latin typeface="Cambria Math" panose="02040503050406030204" pitchFamily="18" charset="0"/>
+                          </a:rPr>
+                        </m:ctrlPr>
+                      </m:dPr>
+                      <m:e>
+                        <m:d>
+                          <m:dPr>
+                            <m:begChr m:val="|"/>
+                            <m:endChr m:val="|"/>
+                            <m:ctrlPr>
+                              <a:rPr lang="en-US" b="0" i="1" smtClean="0">
+                                <a:latin typeface="Cambria Math" panose="02040503050406030204" pitchFamily="18" charset="0"/>
+                              </a:rPr>
+                            </m:ctrlPr>
+                          </m:dPr>
+                          <m:e>
+                            <m:r>
+                              <a:rPr lang="en-US" b="0" i="1" smtClean="0">
+                                <a:latin typeface="Cambria Math" panose="02040503050406030204" pitchFamily="18" charset="0"/>
+                              </a:rPr>
+                              <m:t>𝑉</m:t>
+                            </m:r>
+                          </m:e>
+                        </m:d>
+                      </m:e>
+                    </m:d>
+                    <m:r>
+                      <a:rPr lang="en-US" b="0" i="1" smtClean="0">
+                        <a:latin typeface="Cambria Math" panose="02040503050406030204" pitchFamily="18" charset="0"/>
+                      </a:rPr>
+                      <m:t>,</m:t>
+                    </m:r>
+                  </m:oMath>
+                </a14:m>
+                <a:r>
+                  <a:rPr lang="en-US" dirty="0"/>
+                  <a:t> then BFS takes </a:t>
+                </a:r>
+                <a14:m>
+                  <m:oMath xmlns:m="http://schemas.openxmlformats.org/officeDocument/2006/math">
+                    <m:r>
+                      <m:rPr>
+                        <m:sty m:val="p"/>
+                      </m:rPr>
+                      <a:rPr lang="en-US" b="0" i="0" smtClean="0">
+                        <a:latin typeface="Cambria Math" panose="02040503050406030204" pitchFamily="18" charset="0"/>
+                      </a:rPr>
+                      <m:t>Θ</m:t>
+                    </m:r>
+                    <m:d>
+                      <m:dPr>
+                        <m:ctrlPr>
+                          <a:rPr lang="en-US" b="0" i="1" smtClean="0">
+                            <a:latin typeface="Cambria Math" panose="02040503050406030204" pitchFamily="18" charset="0"/>
+                          </a:rPr>
+                        </m:ctrlPr>
+                      </m:dPr>
+                      <m:e>
+                        <m:d>
+                          <m:dPr>
+                            <m:begChr m:val="|"/>
+                            <m:endChr m:val="|"/>
+                            <m:ctrlPr>
+                              <a:rPr lang="en-US" b="0" i="1" smtClean="0">
+                                <a:latin typeface="Cambria Math" panose="02040503050406030204" pitchFamily="18" charset="0"/>
+                              </a:rPr>
+                            </m:ctrlPr>
+                          </m:dPr>
+                          <m:e>
+                            <m:r>
+                              <a:rPr lang="en-US" b="0" i="1" smtClean="0">
+                                <a:latin typeface="Cambria Math" panose="02040503050406030204" pitchFamily="18" charset="0"/>
+                              </a:rPr>
+                              <m:t>𝑉</m:t>
+                            </m:r>
+                          </m:e>
+                        </m:d>
+                      </m:e>
+                    </m:d>
+                  </m:oMath>
+                </a14:m>
+                <a:r>
+                  <a:rPr lang="en-US" dirty="0"/>
+                  <a:t> time </a:t>
+                </a:r>
+              </a:p>
+              <a:p>
+                <a:r>
+                  <a:rPr lang="en-US" dirty="0"/>
+                  <a:t>If the graph is a complete graph, then BFS takes </a:t>
+                </a:r>
+                <a14:m>
+                  <m:oMath xmlns:m="http://schemas.openxmlformats.org/officeDocument/2006/math">
+                    <m:r>
+                      <a:rPr lang="en-US" b="0" i="1" smtClean="0">
+                        <a:latin typeface="Cambria Math" panose="02040503050406030204" pitchFamily="18" charset="0"/>
+                      </a:rPr>
+                      <m:t>_____________</m:t>
+                    </m:r>
+                  </m:oMath>
+                </a14:m>
+                <a:endParaRPr lang="en-US" dirty="0"/>
+              </a:p>
+              <a:p>
+                <a:pPr lvl="1"/>
+                <a:endParaRPr lang="en-US" dirty="0"/>
+              </a:p>
+              <a:p>
+                <a:endParaRPr lang="en-US" dirty="0"/>
+              </a:p>
+            </p:txBody>
+          </p:sp>
+        </mc:Choice>
+        <mc:Fallback>
+          <p:sp>
+            <p:nvSpPr>
+              <p:cNvPr id="3" name="Content Placeholder 2">
+                <a:extLst>
+                  <a:ext uri="{FF2B5EF4-FFF2-40B4-BE49-F238E27FC236}">
+                    <a16:creationId xmlns:a16="http://schemas.microsoft.com/office/drawing/2014/main" id="{60CE6A08-0283-78F9-BFDA-4FBE0725F079}"/>
+                  </a:ext>
+                </a:extLst>
+              </p:cNvPr>
+              <p:cNvSpPr>
+                <a:spLocks noGrp="1" noRot="1" noChangeAspect="1" noMove="1" noResize="1" noEditPoints="1" noAdjustHandles="1" noChangeArrowheads="1" noChangeShapeType="1" noTextEdit="1"/>
+              </p:cNvSpPr>
+              <p:nvPr>
+                <p:ph sz="quarter" idx="1"/>
+              </p:nvPr>
+            </p:nvSpPr>
+            <p:spPr>
+              <a:blipFill>
+                <a:blip r:embed="rId2"/>
+                <a:stretch>
+                  <a:fillRect l="-500" t="-1111" r="-444"/>
+                </a:stretch>
+              </a:blipFill>
+            </p:spPr>
+            <p:txBody>
+              <a:bodyPr/>
+              <a:lstStyle/>
+              <a:p>
+                <a:r>
+                  <a:rPr lang="en-US">
+                    <a:noFill/>
+                  </a:rPr>
+                  <a:t> </a:t>
+                </a:r>
+              </a:p>
+            </p:txBody>
+          </p:sp>
+        </mc:Fallback>
+      </mc:AlternateContent>
+    </p:spTree>
+    <p:extLst>
+      <p:ext uri="{BB962C8B-B14F-4D97-AF65-F5344CB8AC3E}">
+        <p14:creationId xmlns:p14="http://schemas.microsoft.com/office/powerpoint/2010/main" val="3316795822"/>
+      </p:ext>
+    </p:extLst>
+  </p:cSld>
+  <p:clrMapOvr>
+    <a:masterClrMapping/>
+  </p:clrMapOvr>
+</p:sld>
+</file>
+
+<file path=ppt/slides/slide3.xml><?xml version="1.0" encoding="utf-8"?>
+<p:sld xmlns:a="http://schemas.openxmlformats.org/drawingml/2006/main" xmlns:r="http://schemas.openxmlformats.org/officeDocument/2006/relationships" xmlns:p="http://schemas.openxmlformats.org/presentationml/2006/main">
+  <p:cSld>
+    <p:spTree>
+      <p:nvGrpSpPr>
+        <p:cNvPr id="1" name=""/>
+        <p:cNvGrpSpPr/>
+        <p:nvPr/>
+      </p:nvGrpSpPr>
+      <p:grpSpPr>
+        <a:xfrm>
+          <a:off x="0" y="0"/>
+          <a:ext cx="0" cy="0"/>
+          <a:chOff x="0" y="0"/>
+          <a:chExt cx="0" cy="0"/>
+        </a:xfrm>
+      </p:grpSpPr>
+      <p:sp>
+        <p:nvSpPr>
+          <p:cNvPr id="2" name="Title 1">
+            <a:extLst>
+              <a:ext uri="{FF2B5EF4-FFF2-40B4-BE49-F238E27FC236}">
+                <a16:creationId xmlns:a16="http://schemas.microsoft.com/office/drawing/2014/main" id="{16948F29-5A78-48C8-A618-71E96864ECC2}"/>
+              </a:ext>
+            </a:extLst>
+          </p:cNvPr>
+          <p:cNvSpPr>
+            <a:spLocks noGrp="1"/>
+          </p:cNvSpPr>
+          <p:nvPr>
+            <p:ph type="title"/>
+          </p:nvPr>
+        </p:nvSpPr>
+        <p:spPr/>
+        <p:txBody>
+          <a:bodyPr/>
+          <a:lstStyle/>
+          <a:p>
+            <a:r>
+              <a:rPr lang="en-US" dirty="0"/>
+              <a:t>General high-level ideas</a:t>
+            </a:r>
+          </a:p>
+        </p:txBody>
+      </p:sp>
+      <p:sp>
+        <p:nvSpPr>
+          <p:cNvPr id="3" name="Content Placeholder 2">
+            <a:extLst>
+              <a:ext uri="{FF2B5EF4-FFF2-40B4-BE49-F238E27FC236}">
+                <a16:creationId xmlns:a16="http://schemas.microsoft.com/office/drawing/2014/main" id="{E875E1C2-76D2-4EDF-B77E-B5CEAD2FC275}"/>
+              </a:ext>
+            </a:extLst>
+          </p:cNvPr>
+          <p:cNvSpPr>
+            <a:spLocks noGrp="1"/>
+          </p:cNvSpPr>
+          <p:nvPr>
+            <p:ph sz="quarter" idx="1"/>
+          </p:nvPr>
+        </p:nvSpPr>
+        <p:spPr>
+          <a:xfrm>
+            <a:off x="609600" y="1219200"/>
+            <a:ext cx="11125200" cy="5105400"/>
+          </a:xfrm>
+        </p:spPr>
+        <p:txBody>
+          <a:bodyPr/>
+          <a:lstStyle/>
+          <a:p>
+            <a:r>
+              <a:rPr lang="en-US" dirty="0"/>
+              <a:t>At any point during a search, each node is in exactly one of three states:</a:t>
+            </a:r>
+          </a:p>
+          <a:p>
+            <a:pPr lvl="1"/>
+            <a:r>
+              <a:rPr lang="en-US" dirty="0">
+                <a:solidFill>
+                  <a:srgbClr val="00B050"/>
+                </a:solidFill>
+              </a:rPr>
+              <a:t>undiscovered</a:t>
+            </a:r>
+            <a:r>
+              <a:rPr lang="en-US" dirty="0"/>
+              <a:t> </a:t>
+            </a:r>
+          </a:p>
+          <a:p>
+            <a:pPr lvl="1"/>
+            <a:r>
+              <a:rPr lang="en-US" dirty="0">
+                <a:solidFill>
+                  <a:schemeClr val="accent4">
+                    <a:lumMod val="75000"/>
+                  </a:schemeClr>
+                </a:solidFill>
+              </a:rPr>
+              <a:t>pending</a:t>
+            </a:r>
+            <a:r>
+              <a:rPr lang="en-US" dirty="0"/>
+              <a:t> (discovered, but has not finished exploring it)</a:t>
+            </a:r>
+          </a:p>
+          <a:p>
+            <a:pPr lvl="2"/>
+            <a:r>
+              <a:rPr lang="en-US" dirty="0"/>
+              <a:t>we say that a node is ``discovered” when seeing it first time, at which point its status is changed from </a:t>
+            </a:r>
+            <a:r>
+              <a:rPr lang="en-US" dirty="0">
+                <a:solidFill>
+                  <a:srgbClr val="00B050"/>
+                </a:solidFill>
+              </a:rPr>
+              <a:t>undiscovered</a:t>
+            </a:r>
+            <a:r>
+              <a:rPr lang="en-US" dirty="0"/>
+              <a:t> to </a:t>
+            </a:r>
+            <a:r>
+              <a:rPr lang="en-US" dirty="0">
+                <a:solidFill>
+                  <a:srgbClr val="C00000"/>
+                </a:solidFill>
+              </a:rPr>
+              <a:t>pending</a:t>
+            </a:r>
+            <a:r>
+              <a:rPr lang="en-US" dirty="0"/>
+              <a:t>. </a:t>
+            </a:r>
+          </a:p>
+          <a:p>
+            <a:pPr lvl="1"/>
+            <a:r>
+              <a:rPr lang="en-US" dirty="0">
+                <a:solidFill>
+                  <a:srgbClr val="C00000"/>
+                </a:solidFill>
+              </a:rPr>
+              <a:t>visited</a:t>
+            </a:r>
+            <a:r>
+              <a:rPr lang="en-US" dirty="0"/>
+              <a:t> (done with exploring all its neighbors)</a:t>
+            </a:r>
+          </a:p>
+          <a:p>
+            <a:pPr lvl="1"/>
+            <a:endParaRPr lang="en-US" sz="1000" dirty="0"/>
+          </a:p>
+          <a:p>
+            <a:r>
+              <a:rPr lang="en-US" dirty="0"/>
+              <a:t>At the beginning, all nodes are </a:t>
+            </a:r>
+            <a:r>
+              <a:rPr lang="en-US" dirty="0">
+                <a:solidFill>
+                  <a:srgbClr val="00B050"/>
+                </a:solidFill>
+              </a:rPr>
+              <a:t>undiscovered</a:t>
+            </a:r>
+            <a:endParaRPr lang="en-US" dirty="0"/>
+          </a:p>
+          <a:p>
+            <a:r>
+              <a:rPr lang="en-US" dirty="0"/>
+              <a:t>At every step, </a:t>
+            </a:r>
+          </a:p>
+          <a:p>
+            <a:pPr lvl="1"/>
+            <a:r>
+              <a:rPr lang="en-US" dirty="0"/>
+              <a:t>the search strategy will choose the next node to visit (explore) from the list of </a:t>
+            </a:r>
+            <a:r>
+              <a:rPr lang="en-US" dirty="0">
+                <a:solidFill>
+                  <a:schemeClr val="accent4">
+                    <a:lumMod val="75000"/>
+                  </a:schemeClr>
+                </a:solidFill>
+              </a:rPr>
+              <a:t>pending</a:t>
+            </a:r>
+            <a:r>
+              <a:rPr lang="en-US" dirty="0"/>
+              <a:t> nodes </a:t>
+            </a:r>
+          </a:p>
+          <a:p>
+            <a:pPr lvl="1"/>
+            <a:r>
+              <a:rPr lang="en-US" dirty="0"/>
+              <a:t>if a node is “</a:t>
+            </a:r>
+            <a:r>
+              <a:rPr lang="en-US" dirty="0">
+                <a:solidFill>
+                  <a:srgbClr val="C00000"/>
+                </a:solidFill>
+              </a:rPr>
+              <a:t>visited</a:t>
+            </a:r>
+            <a:r>
+              <a:rPr lang="en-US" dirty="0"/>
+              <a:t>”, then all its neighbors should be in  “</a:t>
+            </a:r>
+            <a:r>
+              <a:rPr lang="en-US" dirty="0">
+                <a:solidFill>
+                  <a:schemeClr val="accent4">
+                    <a:lumMod val="75000"/>
+                  </a:schemeClr>
+                </a:solidFill>
+              </a:rPr>
+              <a:t>pending</a:t>
+            </a:r>
+            <a:r>
+              <a:rPr lang="en-US" dirty="0"/>
+              <a:t>” or “</a:t>
+            </a:r>
+            <a:r>
+              <a:rPr lang="en-US" dirty="0">
+                <a:solidFill>
+                  <a:srgbClr val="C00000"/>
+                </a:solidFill>
+              </a:rPr>
+              <a:t>visited</a:t>
+            </a:r>
+            <a:r>
+              <a:rPr lang="en-US" dirty="0"/>
+              <a:t>”</a:t>
+            </a:r>
+          </a:p>
+          <a:p>
+            <a:pPr lvl="1"/>
+            <a:endParaRPr lang="en-US" dirty="0"/>
+          </a:p>
+        </p:txBody>
+      </p:sp>
+    </p:spTree>
+    <p:extLst>
+      <p:ext uri="{BB962C8B-B14F-4D97-AF65-F5344CB8AC3E}">
+        <p14:creationId xmlns:p14="http://schemas.microsoft.com/office/powerpoint/2010/main" val="151654231"/>
+      </p:ext>
+    </p:extLst>
+  </p:cSld>
+  <p:clrMapOvr>
+    <a:masterClrMapping/>
+  </p:clrMapOvr>
+  <p:timing>
+    <p:tnLst>
+      <p:par>
+        <p:cTn id="1" dur="indefinite" restart="never" nodeType="tmRoot">
+          <p:childTnLst>
+            <p:seq concurrent="1" nextAc="seek">
+              <p:cTn id="2" dur="indefinite" nodeType="mainSeq">
+                <p:childTnLst>
+                  <p:par>
+                    <p:cTn id="3" fill="hold">
+                      <p:stCondLst>
+                        <p:cond delay="indefinite"/>
+                      </p:stCondLst>
+                      <p:childTnLst>
+                        <p:par>
+                          <p:cTn id="4" fill="hold">
+                            <p:stCondLst>
+                              <p:cond delay="0"/>
+                            </p:stCondLst>
+                            <p:childTnLst>
+                              <p:par>
+                                <p:cTn id="5" presetID="1" presetClass="entr" presetSubtype="0" fill="hold" nodeType="clickEffect">
+                                  <p:stCondLst>
+                                    <p:cond delay="0"/>
+                                  </p:stCondLst>
+                                  <p:childTnLst>
+                                    <p:set>
+                                      <p:cBhvr>
+                                        <p:cTn id="6" dur="1" fill="hold">
+                                          <p:stCondLst>
+                                            <p:cond delay="0"/>
+                                          </p:stCondLst>
+                                        </p:cTn>
+                                        <p:tgtEl>
+                                          <p:spTgt spid="3">
+                                            <p:txEl>
+                                              <p:pRg st="6" end="6"/>
+                                            </p:txEl>
+                                          </p:spTgt>
+                                        </p:tgtEl>
+                                        <p:attrNameLst>
+                                          <p:attrName>style.visibility</p:attrName>
+                                        </p:attrNameLst>
+                                      </p:cBhvr>
+                                      <p:to>
+                                        <p:strVal val="visible"/>
+                                      </p:to>
+                                    </p:set>
+                                  </p:childTnLst>
+                                </p:cTn>
+                              </p:par>
+                            </p:childTnLst>
+                          </p:cTn>
+                        </p:par>
+                      </p:childTnLst>
+                    </p:cTn>
+                  </p:par>
+                  <p:par>
+                    <p:cTn id="7" fill="hold">
+                      <p:stCondLst>
+                        <p:cond delay="indefinite"/>
+                      </p:stCondLst>
+                      <p:childTnLst>
+                        <p:par>
+                          <p:cTn id="8" fill="hold">
+                            <p:stCondLst>
+                              <p:cond delay="0"/>
+                            </p:stCondLst>
+                            <p:childTnLst>
+                              <p:par>
+                                <p:cTn id="9" presetID="1" presetClass="entr" presetSubtype="0" fill="hold" nodeType="clickEffect">
+                                  <p:stCondLst>
+                                    <p:cond delay="0"/>
+                                  </p:stCondLst>
+                                  <p:childTnLst>
+                                    <p:set>
+                                      <p:cBhvr>
+                                        <p:cTn id="10" dur="1" fill="hold">
+                                          <p:stCondLst>
+                                            <p:cond delay="0"/>
+                                          </p:stCondLst>
+                                        </p:cTn>
+                                        <p:tgtEl>
+                                          <p:spTgt spid="3">
+                                            <p:txEl>
+                                              <p:pRg st="7" end="7"/>
+                                            </p:txEl>
+                                          </p:spTgt>
+                                        </p:tgtEl>
+                                        <p:attrNameLst>
+                                          <p:attrName>style.visibility</p:attrName>
+                                        </p:attrNameLst>
+                                      </p:cBhvr>
+                                      <p:to>
+                                        <p:strVal val="visible"/>
+                                      </p:to>
+                                    </p:set>
+                                  </p:childTnLst>
+                                </p:cTn>
+                              </p:par>
+                              <p:par>
+                                <p:cTn id="11" presetID="1" presetClass="entr" presetSubtype="0" fill="hold" nodeType="withEffect">
+                                  <p:stCondLst>
+                                    <p:cond delay="0"/>
+                                  </p:stCondLst>
+                                  <p:childTnLst>
+                                    <p:set>
+                                      <p:cBhvr>
+                                        <p:cTn id="12" dur="1" fill="hold">
+                                          <p:stCondLst>
+                                            <p:cond delay="0"/>
+                                          </p:stCondLst>
+                                        </p:cTn>
+                                        <p:tgtEl>
+                                          <p:spTgt spid="3">
+                                            <p:txEl>
+                                              <p:pRg st="8" end="8"/>
+                                            </p:txEl>
+                                          </p:spTgt>
+                                        </p:tgtEl>
+                                        <p:attrNameLst>
+                                          <p:attrName>style.visibility</p:attrName>
+                                        </p:attrNameLst>
+                                      </p:cBhvr>
+                                      <p:to>
+                                        <p:strVal val="visible"/>
+                                      </p:to>
+                                    </p:set>
+                                  </p:childTnLst>
+                                </p:cTn>
+                              </p:par>
+                              <p:par>
+                                <p:cTn id="13" presetID="1" presetClass="entr" presetSubtype="0" fill="hold" nodeType="withEffect">
+                                  <p:stCondLst>
+                                    <p:cond delay="0"/>
+                                  </p:stCondLst>
+                                  <p:childTnLst>
+                                    <p:set>
+                                      <p:cBhvr>
+                                        <p:cTn id="14" dur="1" fill="hold">
+                                          <p:stCondLst>
+                                            <p:cond delay="0"/>
+                                          </p:stCondLst>
+                                        </p:cTn>
+                                        <p:tgtEl>
+                                          <p:spTgt spid="3">
+                                            <p:txEl>
+                                              <p:pRg st="9" end="9"/>
+                                            </p:txEl>
+                                          </p:spTgt>
+                                        </p:tgtEl>
+                                        <p:attrNameLst>
+                                          <p:attrName>style.visibility</p:attrName>
+                                        </p:attrNameLst>
+                                      </p:cBhvr>
+                                      <p:to>
+                                        <p:strVal val="visible"/>
+                                      </p:to>
+                                    </p:set>
+                                  </p:childTnLst>
+                                </p:cTn>
+                              </p:par>
+                            </p:childTnLst>
+                          </p:cTn>
+                        </p:par>
+                      </p:childTnLst>
+                    </p:cTn>
+                  </p:par>
+                </p:childTnLst>
+              </p:cTn>
+              <p:prevCondLst>
+                <p:cond evt="onPrev" delay="0">
+                  <p:tgtEl>
+                    <p:sldTgt/>
+                  </p:tgtEl>
+                </p:cond>
+              </p:prevCondLst>
+              <p:nextCondLst>
+                <p:cond evt="onNext" delay="0">
+                  <p:tgtEl>
+                    <p:sldTgt/>
+                  </p:tgtEl>
+                </p:cond>
+              </p:nextCondLst>
+            </p:seq>
+          </p:childTnLst>
+        </p:cTn>
+      </p:par>
+    </p:tnLst>
+  </p:timing>
+</p:sld>
+</file>
+
+<file path=ppt/slides/slide30.xml><?xml version="1.0" encoding="utf-8"?>
 <p:sld xmlns:a="http://schemas.openxmlformats.org/drawingml/2006/main" xmlns:r="http://schemas.openxmlformats.org/officeDocument/2006/relationships" xmlns:p="http://schemas.openxmlformats.org/presentationml/2006/main">
   <p:cSld>
     <p:spTree>
@@ -15523,7 +18396,7 @@
 </p:sld>
 </file>
 
-<file path=ppt/slides/slide23.xml><?xml version="1.0" encoding="utf-8"?>
+<file path=ppt/slides/slide31.xml><?xml version="1.0" encoding="utf-8"?>
 <p:sld xmlns:a="http://schemas.openxmlformats.org/drawingml/2006/main" xmlns:r="http://schemas.openxmlformats.org/officeDocument/2006/relationships" xmlns:p="http://schemas.openxmlformats.org/presentationml/2006/main">
   <p:cSld>
     <p:spTree>
@@ -15587,460 +18460,6 @@
 </p:sld>
 </file>
 
-<file path=ppt/slides/slide3.xml><?xml version="1.0" encoding="utf-8"?>
-<p:sld xmlns:a="http://schemas.openxmlformats.org/drawingml/2006/main" xmlns:r="http://schemas.openxmlformats.org/officeDocument/2006/relationships" xmlns:p="http://schemas.openxmlformats.org/presentationml/2006/main">
-  <p:cSld>
-    <p:spTree>
-      <p:nvGrpSpPr>
-        <p:cNvPr id="1" name=""/>
-        <p:cNvGrpSpPr/>
-        <p:nvPr/>
-      </p:nvGrpSpPr>
-      <p:grpSpPr>
-        <a:xfrm>
-          <a:off x="0" y="0"/>
-          <a:ext cx="0" cy="0"/>
-          <a:chOff x="0" y="0"/>
-          <a:chExt cx="0" cy="0"/>
-        </a:xfrm>
-      </p:grpSpPr>
-      <p:sp>
-        <p:nvSpPr>
-          <p:cNvPr id="2" name="Title 1">
-            <a:extLst>
-              <a:ext uri="{FF2B5EF4-FFF2-40B4-BE49-F238E27FC236}">
-                <a16:creationId xmlns:a16="http://schemas.microsoft.com/office/drawing/2014/main" id="{16948F29-5A78-48C8-A618-71E96864ECC2}"/>
-              </a:ext>
-            </a:extLst>
-          </p:cNvPr>
-          <p:cNvSpPr>
-            <a:spLocks noGrp="1"/>
-          </p:cNvSpPr>
-          <p:nvPr>
-            <p:ph type="title"/>
-          </p:nvPr>
-        </p:nvSpPr>
-        <p:spPr/>
-        <p:txBody>
-          <a:bodyPr/>
-          <a:lstStyle/>
-          <a:p>
-            <a:r>
-              <a:rPr lang="en-US" dirty="0"/>
-              <a:t>General high-level ideas</a:t>
-            </a:r>
-          </a:p>
-        </p:txBody>
-      </p:sp>
-      <p:sp>
-        <p:nvSpPr>
-          <p:cNvPr id="3" name="Content Placeholder 2">
-            <a:extLst>
-              <a:ext uri="{FF2B5EF4-FFF2-40B4-BE49-F238E27FC236}">
-                <a16:creationId xmlns:a16="http://schemas.microsoft.com/office/drawing/2014/main" id="{E875E1C2-76D2-4EDF-B77E-B5CEAD2FC275}"/>
-              </a:ext>
-            </a:extLst>
-          </p:cNvPr>
-          <p:cNvSpPr>
-            <a:spLocks noGrp="1"/>
-          </p:cNvSpPr>
-          <p:nvPr>
-            <p:ph sz="quarter" idx="1"/>
-          </p:nvPr>
-        </p:nvSpPr>
-        <p:spPr>
-          <a:xfrm>
-            <a:off x="609600" y="1219200"/>
-            <a:ext cx="11125200" cy="5105400"/>
-          </a:xfrm>
-        </p:spPr>
-        <p:txBody>
-          <a:bodyPr/>
-          <a:lstStyle/>
-          <a:p>
-            <a:r>
-              <a:rPr lang="en-US" dirty="0"/>
-              <a:t>Each node has one of the following three states:</a:t>
-            </a:r>
-          </a:p>
-          <a:p>
-            <a:pPr lvl="1"/>
-            <a:r>
-              <a:rPr lang="en-US" dirty="0">
-                <a:solidFill>
-                  <a:srgbClr val="00B050"/>
-                </a:solidFill>
-              </a:rPr>
-              <a:t>undiscovered</a:t>
-            </a:r>
-            <a:r>
-              <a:rPr lang="en-US" dirty="0"/>
-              <a:t> </a:t>
-            </a:r>
-          </a:p>
-          <a:p>
-            <a:pPr lvl="1"/>
-            <a:r>
-              <a:rPr lang="en-US" dirty="0">
-                <a:solidFill>
-                  <a:schemeClr val="accent4">
-                    <a:lumMod val="75000"/>
-                  </a:schemeClr>
-                </a:solidFill>
-              </a:rPr>
-              <a:t>pending</a:t>
-            </a:r>
-            <a:r>
-              <a:rPr lang="en-US" dirty="0"/>
-              <a:t> (discovered, but has not finished exploring it)</a:t>
-            </a:r>
-          </a:p>
-          <a:p>
-            <a:pPr lvl="2"/>
-            <a:r>
-              <a:rPr lang="en-US" dirty="0"/>
-              <a:t>we say that a node is ``discovered” when seeing it first time, at which point its status is changed from </a:t>
-            </a:r>
-            <a:r>
-              <a:rPr lang="en-US" dirty="0">
-                <a:solidFill>
-                  <a:srgbClr val="00B050"/>
-                </a:solidFill>
-              </a:rPr>
-              <a:t>undiscovered</a:t>
-            </a:r>
-            <a:r>
-              <a:rPr lang="en-US" dirty="0"/>
-              <a:t> to </a:t>
-            </a:r>
-            <a:r>
-              <a:rPr lang="en-US" dirty="0">
-                <a:solidFill>
-                  <a:srgbClr val="C00000"/>
-                </a:solidFill>
-              </a:rPr>
-              <a:t>pending</a:t>
-            </a:r>
-            <a:r>
-              <a:rPr lang="en-US" dirty="0"/>
-              <a:t>. </a:t>
-            </a:r>
-          </a:p>
-          <a:p>
-            <a:pPr lvl="1"/>
-            <a:r>
-              <a:rPr lang="en-US" dirty="0">
-                <a:solidFill>
-                  <a:srgbClr val="C00000"/>
-                </a:solidFill>
-              </a:rPr>
-              <a:t>visited</a:t>
-            </a:r>
-            <a:r>
-              <a:rPr lang="en-US" dirty="0"/>
-              <a:t> (done with exploring all its neighbors)</a:t>
-            </a:r>
-          </a:p>
-          <a:p>
-            <a:pPr lvl="1"/>
-            <a:endParaRPr lang="en-US" sz="1000" dirty="0"/>
-          </a:p>
-          <a:p>
-            <a:r>
-              <a:rPr lang="en-US" dirty="0"/>
-              <a:t>At the beginning, all nodes are </a:t>
-            </a:r>
-            <a:r>
-              <a:rPr lang="en-US" dirty="0">
-                <a:solidFill>
-                  <a:srgbClr val="00B050"/>
-                </a:solidFill>
-              </a:rPr>
-              <a:t>undiscovered</a:t>
-            </a:r>
-            <a:endParaRPr lang="en-US" dirty="0"/>
-          </a:p>
-          <a:p>
-            <a:r>
-              <a:rPr lang="en-US" dirty="0"/>
-              <a:t>At any moment, </a:t>
-            </a:r>
-          </a:p>
-          <a:p>
-            <a:pPr lvl="1"/>
-            <a:r>
-              <a:rPr lang="en-US" dirty="0"/>
-              <a:t>the search strategy will choose next node to visit (explore) from the list of </a:t>
-            </a:r>
-            <a:r>
-              <a:rPr lang="en-US" dirty="0">
-                <a:solidFill>
-                  <a:schemeClr val="accent4">
-                    <a:lumMod val="75000"/>
-                  </a:schemeClr>
-                </a:solidFill>
-              </a:rPr>
-              <a:t>pending</a:t>
-            </a:r>
-            <a:r>
-              <a:rPr lang="en-US" dirty="0"/>
-              <a:t> nodes </a:t>
-            </a:r>
-          </a:p>
-          <a:p>
-            <a:pPr lvl="1"/>
-            <a:r>
-              <a:rPr lang="en-US" dirty="0"/>
-              <a:t>if a node is “</a:t>
-            </a:r>
-            <a:r>
-              <a:rPr lang="en-US" dirty="0">
-                <a:solidFill>
-                  <a:srgbClr val="C00000"/>
-                </a:solidFill>
-              </a:rPr>
-              <a:t>visited</a:t>
-            </a:r>
-            <a:r>
-              <a:rPr lang="en-US" dirty="0"/>
-              <a:t>”, then all its neighbors should be in  “</a:t>
-            </a:r>
-            <a:r>
-              <a:rPr lang="en-US" dirty="0">
-                <a:solidFill>
-                  <a:schemeClr val="accent4">
-                    <a:lumMod val="75000"/>
-                  </a:schemeClr>
-                </a:solidFill>
-              </a:rPr>
-              <a:t>pending</a:t>
-            </a:r>
-            <a:r>
-              <a:rPr lang="en-US" dirty="0"/>
-              <a:t>” or “</a:t>
-            </a:r>
-            <a:r>
-              <a:rPr lang="en-US" dirty="0">
-                <a:solidFill>
-                  <a:srgbClr val="C00000"/>
-                </a:solidFill>
-              </a:rPr>
-              <a:t>visited</a:t>
-            </a:r>
-            <a:r>
-              <a:rPr lang="en-US" dirty="0"/>
-              <a:t>”</a:t>
-            </a:r>
-          </a:p>
-          <a:p>
-            <a:pPr lvl="1"/>
-            <a:endParaRPr lang="en-US" dirty="0"/>
-          </a:p>
-        </p:txBody>
-      </p:sp>
-    </p:spTree>
-    <p:extLst>
-      <p:ext uri="{BB962C8B-B14F-4D97-AF65-F5344CB8AC3E}">
-        <p14:creationId xmlns:p14="http://schemas.microsoft.com/office/powerpoint/2010/main" val="151654231"/>
-      </p:ext>
-    </p:extLst>
-  </p:cSld>
-  <p:clrMapOvr>
-    <a:masterClrMapping/>
-  </p:clrMapOvr>
-  <p:timing>
-    <p:tnLst>
-      <p:par>
-        <p:cTn id="1" dur="indefinite" restart="never" nodeType="tmRoot">
-          <p:childTnLst>
-            <p:seq concurrent="1" nextAc="seek">
-              <p:cTn id="2" dur="indefinite" nodeType="mainSeq">
-                <p:childTnLst>
-                  <p:par>
-                    <p:cTn id="3" fill="hold">
-                      <p:stCondLst>
-                        <p:cond delay="indefinite"/>
-                      </p:stCondLst>
-                      <p:childTnLst>
-                        <p:par>
-                          <p:cTn id="4" fill="hold">
-                            <p:stCondLst>
-                              <p:cond delay="0"/>
-                            </p:stCondLst>
-                            <p:childTnLst>
-                              <p:par>
-                                <p:cTn id="5" presetID="1" presetClass="entr" presetSubtype="0" fill="hold" nodeType="clickEffect">
-                                  <p:stCondLst>
-                                    <p:cond delay="0"/>
-                                  </p:stCondLst>
-                                  <p:childTnLst>
-                                    <p:set>
-                                      <p:cBhvr>
-                                        <p:cTn id="6" dur="1" fill="hold">
-                                          <p:stCondLst>
-                                            <p:cond delay="0"/>
-                                          </p:stCondLst>
-                                        </p:cTn>
-                                        <p:tgtEl>
-                                          <p:spTgt spid="3">
-                                            <p:txEl>
-                                              <p:pRg st="6" end="6"/>
-                                            </p:txEl>
-                                          </p:spTgt>
-                                        </p:tgtEl>
-                                        <p:attrNameLst>
-                                          <p:attrName>style.visibility</p:attrName>
-                                        </p:attrNameLst>
-                                      </p:cBhvr>
-                                      <p:to>
-                                        <p:strVal val="visible"/>
-                                      </p:to>
-                                    </p:set>
-                                  </p:childTnLst>
-                                </p:cTn>
-                              </p:par>
-                            </p:childTnLst>
-                          </p:cTn>
-                        </p:par>
-                      </p:childTnLst>
-                    </p:cTn>
-                  </p:par>
-                  <p:par>
-                    <p:cTn id="7" fill="hold">
-                      <p:stCondLst>
-                        <p:cond delay="indefinite"/>
-                      </p:stCondLst>
-                      <p:childTnLst>
-                        <p:par>
-                          <p:cTn id="8" fill="hold">
-                            <p:stCondLst>
-                              <p:cond delay="0"/>
-                            </p:stCondLst>
-                            <p:childTnLst>
-                              <p:par>
-                                <p:cTn id="9" presetID="1" presetClass="entr" presetSubtype="0" fill="hold" nodeType="clickEffect">
-                                  <p:stCondLst>
-                                    <p:cond delay="0"/>
-                                  </p:stCondLst>
-                                  <p:childTnLst>
-                                    <p:set>
-                                      <p:cBhvr>
-                                        <p:cTn id="10" dur="1" fill="hold">
-                                          <p:stCondLst>
-                                            <p:cond delay="0"/>
-                                          </p:stCondLst>
-                                        </p:cTn>
-                                        <p:tgtEl>
-                                          <p:spTgt spid="3">
-                                            <p:txEl>
-                                              <p:pRg st="7" end="7"/>
-                                            </p:txEl>
-                                          </p:spTgt>
-                                        </p:tgtEl>
-                                        <p:attrNameLst>
-                                          <p:attrName>style.visibility</p:attrName>
-                                        </p:attrNameLst>
-                                      </p:cBhvr>
-                                      <p:to>
-                                        <p:strVal val="visible"/>
-                                      </p:to>
-                                    </p:set>
-                                  </p:childTnLst>
-                                </p:cTn>
-                              </p:par>
-                              <p:par>
-                                <p:cTn id="11" presetID="1" presetClass="entr" presetSubtype="0" fill="hold" nodeType="withEffect">
-                                  <p:stCondLst>
-                                    <p:cond delay="0"/>
-                                  </p:stCondLst>
-                                  <p:childTnLst>
-                                    <p:set>
-                                      <p:cBhvr>
-                                        <p:cTn id="12" dur="1" fill="hold">
-                                          <p:stCondLst>
-                                            <p:cond delay="0"/>
-                                          </p:stCondLst>
-                                        </p:cTn>
-                                        <p:tgtEl>
-                                          <p:spTgt spid="3">
-                                            <p:txEl>
-                                              <p:pRg st="8" end="8"/>
-                                            </p:txEl>
-                                          </p:spTgt>
-                                        </p:tgtEl>
-                                        <p:attrNameLst>
-                                          <p:attrName>style.visibility</p:attrName>
-                                        </p:attrNameLst>
-                                      </p:cBhvr>
-                                      <p:to>
-                                        <p:strVal val="visible"/>
-                                      </p:to>
-                                    </p:set>
-                                  </p:childTnLst>
-                                </p:cTn>
-                              </p:par>
-                              <p:par>
-                                <p:cTn id="13" presetID="1" presetClass="entr" presetSubtype="0" fill="hold" nodeType="withEffect">
-                                  <p:stCondLst>
-                                    <p:cond delay="0"/>
-                                  </p:stCondLst>
-                                  <p:childTnLst>
-                                    <p:set>
-                                      <p:cBhvr>
-                                        <p:cTn id="14" dur="1" fill="hold">
-                                          <p:stCondLst>
-                                            <p:cond delay="0"/>
-                                          </p:stCondLst>
-                                        </p:cTn>
-                                        <p:tgtEl>
-                                          <p:spTgt spid="3">
-                                            <p:txEl>
-                                              <p:pRg st="9" end="9"/>
-                                            </p:txEl>
-                                          </p:spTgt>
-                                        </p:tgtEl>
-                                        <p:attrNameLst>
-                                          <p:attrName>style.visibility</p:attrName>
-                                        </p:attrNameLst>
-                                      </p:cBhvr>
-                                      <p:to>
-                                        <p:strVal val="visible"/>
-                                      </p:to>
-                                    </p:set>
-                                  </p:childTnLst>
-                                </p:cTn>
-                              </p:par>
-                            </p:childTnLst>
-                          </p:cTn>
-                        </p:par>
-                      </p:childTnLst>
-                    </p:cTn>
-                  </p:par>
-                </p:childTnLst>
-              </p:cTn>
-              <p:prevCondLst>
-                <p:cond evt="onPrev" delay="0">
-                  <p:tgtEl>
-                    <p:sldTgt/>
-                  </p:tgtEl>
-                </p:cond>
-              </p:prevCondLst>
-              <p:nextCondLst>
-                <p:cond evt="onNext" delay="0">
-                  <p:tgtEl>
-                    <p:sldTgt/>
-                  </p:tgtEl>
-                </p:cond>
-              </p:nextCondLst>
-            </p:seq>
-          </p:childTnLst>
-        </p:cTn>
-      </p:par>
-    </p:tnLst>
-  </p:timing>
-</p:sld>
-</file>
-
 <file path=ppt/slides/slide4.xml><?xml version="1.0" encoding="utf-8"?>
 <p:sld xmlns:a="http://schemas.openxmlformats.org/drawingml/2006/main" xmlns:r="http://schemas.openxmlformats.org/officeDocument/2006/relationships" xmlns:p="http://schemas.openxmlformats.org/presentationml/2006/main">
   <p:cSld>
@@ -16121,14 +18540,26 @@
             </a:r>
             <a:r>
               <a:rPr lang="en-US" dirty="0"/>
-              <a:t>search:   </a:t>
+              <a:t>search (BFS):   </a:t>
             </a:r>
           </a:p>
           <a:p>
             <a:pPr lvl="2"/>
             <a:r>
               <a:rPr lang="en-US" dirty="0"/>
-              <a:t>choose the ``oldest” pending node </a:t>
+              <a:t>choose the ``</a:t>
+            </a:r>
+            <a:r>
+              <a:rPr lang="en-US" dirty="0">
+                <a:solidFill>
+                  <a:srgbClr val="C00000"/>
+                </a:solidFill>
+              </a:rPr>
+              <a:t>oldest</a:t>
+            </a:r>
+            <a:r>
+              <a:rPr lang="en-US" dirty="0"/>
+              <a:t>” pending node </a:t>
             </a:r>
           </a:p>
           <a:p>
@@ -16154,14 +18585,26 @@
             </a:r>
             <a:r>
               <a:rPr lang="en-US" dirty="0"/>
-              <a:t> search: </a:t>
+              <a:t> search (DFS): </a:t>
             </a:r>
           </a:p>
           <a:p>
             <a:pPr lvl="2"/>
             <a:r>
               <a:rPr lang="en-US" dirty="0"/>
-              <a:t>choose the “newest” pending node</a:t>
+              <a:t>choose the “</a:t>
+            </a:r>
+            <a:r>
+              <a:rPr lang="en-US" dirty="0">
+                <a:solidFill>
+                  <a:srgbClr val="C00000"/>
+                </a:solidFill>
+              </a:rPr>
+              <a:t>newest</a:t>
+            </a:r>
+            <a:r>
+              <a:rPr lang="en-US" dirty="0"/>
+              <a:t>” pending node</a:t>
             </a:r>
           </a:p>
           <a:p>
@@ -16169,6 +18612,16 @@
             <a:r>
               <a:rPr lang="en-US" dirty="0"/>
               <a:t>namely, the one that was discovered last among all pending nodes</a:t>
+            </a:r>
+          </a:p>
+          <a:p>
+            <a:pPr lvl="2"/>
+            <a:endParaRPr lang="en-US" dirty="0"/>
+          </a:p>
+          <a:p>
+            <a:r>
+              <a:rPr lang="en-US" dirty="0"/>
+              <a:t>Both BFS and DFS can explore the entire graph, but they have different properties making them useful in different scenarios. </a:t>
             </a:r>
           </a:p>
           <a:p>
@@ -16306,8 +18759,8 @@
           </a:p>
         </p:txBody>
       </p:sp>
-      <mc:AlternateContent xmlns:mc="http://schemas.openxmlformats.org/markup-compatibility/2006">
-        <mc:Choice xmlns:a14="http://schemas.microsoft.com/office/drawing/2010/main" Requires="a14">
+      <mc:AlternateContent xmlns:mc="http://schemas.openxmlformats.org/markup-compatibility/2006" xmlns:a14="http://schemas.microsoft.com/office/drawing/2010/main">
+        <mc:Choice Requires="a14">
           <p:sp>
             <p:nvSpPr>
               <p:cNvPr id="3" name="Content Placeholder 2">
@@ -16603,7 +19056,7 @@
             </p:txBody>
           </p:sp>
         </mc:Choice>
-        <mc:Fallback>
+        <mc:Fallback xmlns="">
           <p:sp>
             <p:nvSpPr>
               <p:cNvPr id="3" name="Content Placeholder 2">
@@ -18839,6 +21292,220 @@
           </a:p>
         </p:txBody>
       </p:sp>
+      <p:sp>
+        <p:nvSpPr>
+          <p:cNvPr id="3" name="Content Placeholder 2">
+            <a:extLst>
+              <a:ext uri="{FF2B5EF4-FFF2-40B4-BE49-F238E27FC236}">
+                <a16:creationId xmlns:a16="http://schemas.microsoft.com/office/drawing/2014/main" id="{A316BEC4-A04E-496A-B1C3-FD52E18FBF97}"/>
+              </a:ext>
+            </a:extLst>
+          </p:cNvPr>
+          <p:cNvSpPr>
+            <a:spLocks noGrp="1"/>
+          </p:cNvSpPr>
+          <p:nvPr>
+            <p:ph sz="quarter" idx="1"/>
+          </p:nvPr>
+        </p:nvSpPr>
+        <p:spPr/>
+        <p:txBody>
+          <a:bodyPr/>
+          <a:lstStyle/>
+          <a:p>
+            <a:r>
+              <a:rPr lang="en-US" sz="2400" dirty="0"/>
+              <a:t>Recall: the key to BFS is at any moment, it will choose </a:t>
+            </a:r>
+            <a:r>
+              <a:rPr lang="en-US" sz="2400" dirty="0">
+                <a:solidFill>
+                  <a:srgbClr val="700000"/>
+                </a:solidFill>
+              </a:rPr>
+              <a:t>the oldest pending node </a:t>
+            </a:r>
+            <a:r>
+              <a:rPr lang="en-US" sz="2400" dirty="0"/>
+              <a:t>to explore</a:t>
+            </a:r>
+          </a:p>
+          <a:p>
+            <a:endParaRPr lang="en-US" sz="1600" dirty="0"/>
+          </a:p>
+          <a:p>
+            <a:r>
+              <a:rPr lang="en-US" sz="2400" dirty="0"/>
+              <a:t>Need to maintain pending nodes: </a:t>
+            </a:r>
+          </a:p>
+          <a:p>
+            <a:pPr lvl="2"/>
+            <a:endParaRPr lang="en-US" sz="1800" dirty="0"/>
+          </a:p>
+          <a:p>
+            <a:pPr lvl="2"/>
+            <a:endParaRPr lang="en-US" sz="1800" dirty="0"/>
+          </a:p>
+          <a:p>
+            <a:pPr lvl="2"/>
+            <a:endParaRPr lang="en-US" sz="1800" dirty="0"/>
+          </a:p>
+          <a:p>
+            <a:pPr lvl="2"/>
+            <a:endParaRPr lang="en-US" sz="1800" dirty="0"/>
+          </a:p>
+          <a:p>
+            <a:r>
+              <a:rPr lang="en-US" sz="2400" dirty="0"/>
+              <a:t>Need to maintain status: </a:t>
+            </a:r>
+          </a:p>
+        </p:txBody>
+      </p:sp>
+    </p:spTree>
+    <p:extLst>
+      <p:ext uri="{BB962C8B-B14F-4D97-AF65-F5344CB8AC3E}">
+        <p14:creationId xmlns:p14="http://schemas.microsoft.com/office/powerpoint/2010/main" val="4259572542"/>
+      </p:ext>
+    </p:extLst>
+  </p:cSld>
+  <p:clrMapOvr>
+    <a:masterClrMapping/>
+  </p:clrMapOvr>
+  <p:timing>
+    <p:tnLst>
+      <p:par>
+        <p:cTn id="1" dur="indefinite" restart="never" nodeType="tmRoot">
+          <p:childTnLst>
+            <p:seq concurrent="1" nextAc="seek">
+              <p:cTn id="2" dur="indefinite" nodeType="mainSeq">
+                <p:childTnLst>
+                  <p:par>
+                    <p:cTn id="3" fill="hold">
+                      <p:stCondLst>
+                        <p:cond delay="indefinite"/>
+                      </p:stCondLst>
+                      <p:childTnLst>
+                        <p:par>
+                          <p:cTn id="4" fill="hold">
+                            <p:stCondLst>
+                              <p:cond delay="0"/>
+                            </p:stCondLst>
+                            <p:childTnLst>
+                              <p:par>
+                                <p:cTn id="5" presetID="1" presetClass="entr" presetSubtype="0" fill="hold" nodeType="clickEffect">
+                                  <p:stCondLst>
+                                    <p:cond delay="0"/>
+                                  </p:stCondLst>
+                                  <p:childTnLst>
+                                    <p:set>
+                                      <p:cBhvr>
+                                        <p:cTn id="6" dur="1" fill="hold">
+                                          <p:stCondLst>
+                                            <p:cond delay="0"/>
+                                          </p:stCondLst>
+                                        </p:cTn>
+                                        <p:tgtEl>
+                                          <p:spTgt spid="3">
+                                            <p:txEl>
+                                              <p:pRg st="7" end="7"/>
+                                            </p:txEl>
+                                          </p:spTgt>
+                                        </p:tgtEl>
+                                        <p:attrNameLst>
+                                          <p:attrName>style.visibility</p:attrName>
+                                        </p:attrNameLst>
+                                      </p:cBhvr>
+                                      <p:to>
+                                        <p:strVal val="visible"/>
+                                      </p:to>
+                                    </p:set>
+                                  </p:childTnLst>
+                                </p:cTn>
+                              </p:par>
+                            </p:childTnLst>
+                          </p:cTn>
+                        </p:par>
+                      </p:childTnLst>
+                    </p:cTn>
+                  </p:par>
+                </p:childTnLst>
+              </p:cTn>
+              <p:prevCondLst>
+                <p:cond evt="onPrev" delay="0">
+                  <p:tgtEl>
+                    <p:sldTgt/>
+                  </p:tgtEl>
+                </p:cond>
+              </p:prevCondLst>
+              <p:nextCondLst>
+                <p:cond evt="onNext" delay="0">
+                  <p:tgtEl>
+                    <p:sldTgt/>
+                  </p:tgtEl>
+                </p:cond>
+              </p:nextCondLst>
+            </p:seq>
+          </p:childTnLst>
+        </p:cTn>
+      </p:par>
+    </p:tnLst>
+  </p:timing>
+</p:sld>
+</file>
+
+<file path=ppt/slides/slide9.xml><?xml version="1.0" encoding="utf-8"?>
+<p:sld xmlns:a="http://schemas.openxmlformats.org/drawingml/2006/main" xmlns:r="http://schemas.openxmlformats.org/officeDocument/2006/relationships" xmlns:p="http://schemas.openxmlformats.org/presentationml/2006/main">
+  <p:cSld>
+    <p:spTree>
+      <p:nvGrpSpPr>
+        <p:cNvPr id="1" name="">
+          <a:extLst>
+            <a:ext uri="{FF2B5EF4-FFF2-40B4-BE49-F238E27FC236}">
+              <a16:creationId xmlns:a16="http://schemas.microsoft.com/office/drawing/2014/main" id="{BEF77570-900F-432A-F215-03B0D5A6BB38}"/>
+            </a:ext>
+          </a:extLst>
+        </p:cNvPr>
+        <p:cNvGrpSpPr/>
+        <p:nvPr/>
+      </p:nvGrpSpPr>
+      <p:grpSpPr>
+        <a:xfrm>
+          <a:off x="0" y="0"/>
+          <a:ext cx="0" cy="0"/>
+          <a:chOff x="0" y="0"/>
+          <a:chExt cx="0" cy="0"/>
+        </a:xfrm>
+      </p:grpSpPr>
+      <p:sp>
+        <p:nvSpPr>
+          <p:cNvPr id="2" name="Title 1">
+            <a:extLst>
+              <a:ext uri="{FF2B5EF4-FFF2-40B4-BE49-F238E27FC236}">
+                <a16:creationId xmlns:a16="http://schemas.microsoft.com/office/drawing/2014/main" id="{619E045F-580C-3F90-472D-B9C97982C457}"/>
+              </a:ext>
+            </a:extLst>
+          </p:cNvPr>
+          <p:cNvSpPr>
+            <a:spLocks noGrp="1"/>
+          </p:cNvSpPr>
+          <p:nvPr>
+            <p:ph type="title"/>
+          </p:nvPr>
+        </p:nvSpPr>
+        <p:spPr/>
+        <p:txBody>
+          <a:bodyPr/>
+          <a:lstStyle/>
+          <a:p>
+            <a:r>
+              <a:rPr lang="en-US" dirty="0"/>
+              <a:t>How to implement the idea? </a:t>
+            </a:r>
+          </a:p>
+        </p:txBody>
+      </p:sp>
       <mc:AlternateContent xmlns:mc="http://schemas.openxmlformats.org/markup-compatibility/2006">
         <mc:Choice xmlns:a14="http://schemas.microsoft.com/office/drawing/2010/main" Requires="a14">
           <p:sp>
@@ -18846,7 +21513,7 @@
               <p:cNvPr id="3" name="Content Placeholder 2">
                 <a:extLst>
                   <a:ext uri="{FF2B5EF4-FFF2-40B4-BE49-F238E27FC236}">
-                    <a16:creationId xmlns:a16="http://schemas.microsoft.com/office/drawing/2014/main" id="{A316BEC4-A04E-496A-B1C3-FD52E18FBF97}"/>
+                    <a16:creationId xmlns:a16="http://schemas.microsoft.com/office/drawing/2014/main" id="{D5363D98-B78A-C7C1-9DE2-CC95501234F6}"/>
                   </a:ext>
                 </a:extLst>
               </p:cNvPr>
@@ -19020,74 +21687,6 @@
                   <a:t>Need to maintain status: </a:t>
                 </a:r>
               </a:p>
-              <a:p>
-                <a:pPr lvl="1"/>
-                <a:r>
-                  <a:rPr lang="en-US" sz="2000" dirty="0"/>
-                  <a:t>we can use an array to store status if all nodes are indexed from </a:t>
-                </a:r>
-                <a14:m>
-                  <m:oMath xmlns:m="http://schemas.openxmlformats.org/officeDocument/2006/math">
-                    <m:r>
-                      <a:rPr lang="en-US" sz="2000" i="1" dirty="0">
-                        <a:latin typeface="Cambria Math" panose="02040503050406030204" pitchFamily="18" charset="0"/>
-                      </a:rPr>
-                      <m:t>0</m:t>
-                    </m:r>
-                  </m:oMath>
-                </a14:m>
-                <a:r>
-                  <a:rPr lang="en-US" sz="2000" dirty="0"/>
-                  <a:t> to </a:t>
-                </a:r>
-                <a14:m>
-                  <m:oMath xmlns:m="http://schemas.openxmlformats.org/officeDocument/2006/math">
-                    <m:r>
-                      <a:rPr lang="en-US" sz="2000" i="1" dirty="0">
-                        <a:latin typeface="Cambria Math" panose="02040503050406030204" pitchFamily="18" charset="0"/>
-                      </a:rPr>
-                      <m:t>𝑛</m:t>
-                    </m:r>
-                    <m:r>
-                      <a:rPr lang="en-US" sz="2000" i="1" dirty="0">
-                        <a:latin typeface="Cambria Math" panose="02040503050406030204" pitchFamily="18" charset="0"/>
-                      </a:rPr>
-                      <m:t>−1</m:t>
-                    </m:r>
-                  </m:oMath>
-                </a14:m>
-                <a:r>
-                  <a:rPr lang="en-US" sz="2000" dirty="0"/>
-                  <a:t> </a:t>
-                </a:r>
-              </a:p>
-              <a:p>
-                <a:pPr lvl="1"/>
-                <a:r>
-                  <a:rPr lang="en-US" sz="2000" dirty="0"/>
-                  <a:t>or we can use a hash table (</a:t>
-                </a:r>
-                <a:r>
-                  <a:rPr lang="en-US" sz="2000" dirty="0" err="1"/>
-                  <a:t>e.g</a:t>
-                </a:r>
-                <a:r>
-                  <a:rPr lang="en-US" sz="2000" dirty="0"/>
-                  <a:t>, </a:t>
-                </a:r>
-                <a:r>
-                  <a:rPr lang="en-US" sz="2000" dirty="0" err="1">
-                    <a:solidFill>
-                      <a:srgbClr val="00B050"/>
-                    </a:solidFill>
-                  </a:rPr>
-                  <a:t>dict</a:t>
-                </a:r>
-                <a:r>
-                  <a:rPr lang="en-US" sz="2000" dirty="0"/>
-                  <a:t> from python) to store it</a:t>
-                </a:r>
-              </a:p>
             </p:txBody>
           </p:sp>
         </mc:Choice>
@@ -19097,7 +21696,7 @@
               <p:cNvPr id="3" name="Content Placeholder 2">
                 <a:extLst>
                   <a:ext uri="{FF2B5EF4-FFF2-40B4-BE49-F238E27FC236}">
-                    <a16:creationId xmlns:a16="http://schemas.microsoft.com/office/drawing/2014/main" id="{A316BEC4-A04E-496A-B1C3-FD52E18FBF97}"/>
+                    <a16:creationId xmlns:a16="http://schemas.microsoft.com/office/drawing/2014/main" id="{D5363D98-B78A-C7C1-9DE2-CC95501234F6}"/>
                   </a:ext>
                 </a:extLst>
               </p:cNvPr>
@@ -19134,7 +21733,7 @@
     </p:spTree>
     <p:extLst>
       <p:ext uri="{BB962C8B-B14F-4D97-AF65-F5344CB8AC3E}">
-        <p14:creationId xmlns:p14="http://schemas.microsoft.com/office/powerpoint/2010/main" val="4259572542"/>
+        <p14:creationId xmlns:p14="http://schemas.microsoft.com/office/powerpoint/2010/main" val="2067505359"/>
       </p:ext>
     </p:extLst>
   </p:cSld>
@@ -19192,68 +21791,6 @@
                                   </p:childTnLst>
                                 </p:cTn>
                               </p:par>
-                              <p:par>
-                                <p:cTn id="7" presetID="1" presetClass="entr" presetSubtype="0" fill="hold" nodeType="withEffect">
-                                  <p:stCondLst>
-                                    <p:cond delay="0"/>
-                                  </p:stCondLst>
-                                  <p:childTnLst>
-                                    <p:set>
-                                      <p:cBhvr>
-                                        <p:cTn id="8" dur="1" fill="hold">
-                                          <p:stCondLst>
-                                            <p:cond delay="0"/>
-                                          </p:stCondLst>
-                                        </p:cTn>
-                                        <p:tgtEl>
-                                          <p:spTgt spid="3">
-                                            <p:txEl>
-                                              <p:pRg st="9" end="9"/>
-                                            </p:txEl>
-                                          </p:spTgt>
-                                        </p:tgtEl>
-                                        <p:attrNameLst>
-                                          <p:attrName>style.visibility</p:attrName>
-                                        </p:attrNameLst>
-                                      </p:cBhvr>
-                                      <p:to>
-                                        <p:strVal val="visible"/>
-                                      </p:to>
-                                    </p:set>
-                                  </p:childTnLst>
-                                </p:cTn>
-                              </p:par>
-                              <p:par>
-                                <p:cTn id="9" presetID="1" presetClass="entr" presetSubtype="0" fill="hold" nodeType="withEffect">
-                                  <p:stCondLst>
-                                    <p:cond delay="0"/>
-                                  </p:stCondLst>
-                                  <p:childTnLst>
-                                    <p:set>
-                                      <p:cBhvr>
-                                        <p:cTn id="10" dur="1" fill="hold">
-                                          <p:stCondLst>
-                                            <p:cond delay="0"/>
-                                          </p:stCondLst>
-                                        </p:cTn>
-                                        <p:tgtEl>
-                                          <p:spTgt spid="3">
-                                            <p:txEl>
-                                              <p:pRg st="10" end="10"/>
-                                            </p:txEl>
-                                          </p:spTgt>
-                                        </p:tgtEl>
-                                        <p:attrNameLst>
-                                          <p:attrName>style.visibility</p:attrName>
-                                        </p:attrNameLst>
-                                      </p:cBhvr>
-                                      <p:to>
-                                        <p:strVal val="visible"/>
-                                      </p:to>
-                                    </p:set>
-                                  </p:childTnLst>
-                                </p:cTn>
-                              </p:par>
                             </p:childTnLst>
                           </p:cTn>
                         </p:par>
@@ -19282,124 +21819,6 @@
       </p:par>
     </p:tnLst>
   </p:timing>
-</p:sld>
-</file>
-
-<file path=ppt/slides/slide9.xml><?xml version="1.0" encoding="utf-8"?>
-<p:sld xmlns:a="http://schemas.openxmlformats.org/drawingml/2006/main" xmlns:r="http://schemas.openxmlformats.org/officeDocument/2006/relationships" xmlns:p="http://schemas.openxmlformats.org/presentationml/2006/main">
-  <p:cSld>
-    <p:spTree>
-      <p:nvGrpSpPr>
-        <p:cNvPr id="1" name=""/>
-        <p:cNvGrpSpPr/>
-        <p:nvPr/>
-      </p:nvGrpSpPr>
-      <p:grpSpPr>
-        <a:xfrm>
-          <a:off x="0" y="0"/>
-          <a:ext cx="0" cy="0"/>
-          <a:chOff x="0" y="0"/>
-          <a:chExt cx="0" cy="0"/>
-        </a:xfrm>
-      </p:grpSpPr>
-      <p:sp>
-        <p:nvSpPr>
-          <p:cNvPr id="2" name="Title 1">
-            <a:extLst>
-              <a:ext uri="{FF2B5EF4-FFF2-40B4-BE49-F238E27FC236}">
-                <a16:creationId xmlns:a16="http://schemas.microsoft.com/office/drawing/2014/main" id="{28E5058D-473E-48E7-B9A2-7688C33B4EDB}"/>
-              </a:ext>
-            </a:extLst>
-          </p:cNvPr>
-          <p:cNvSpPr>
-            <a:spLocks noGrp="1"/>
-          </p:cNvSpPr>
-          <p:nvPr>
-            <p:ph type="title"/>
-          </p:nvPr>
-        </p:nvSpPr>
-        <p:spPr/>
-        <p:txBody>
-          <a:bodyPr/>
-          <a:lstStyle/>
-          <a:p>
-            <a:r>
-              <a:rPr lang="en-US" dirty="0"/>
-              <a:t>Pseudocode of BFS</a:t>
-            </a:r>
-          </a:p>
-        </p:txBody>
-      </p:sp>
-      <p:sp>
-        <p:nvSpPr>
-          <p:cNvPr id="3" name="Content Placeholder 2">
-            <a:extLst>
-              <a:ext uri="{FF2B5EF4-FFF2-40B4-BE49-F238E27FC236}">
-                <a16:creationId xmlns:a16="http://schemas.microsoft.com/office/drawing/2014/main" id="{923D9880-036B-4486-9064-6EE4ABD4EAA9}"/>
-              </a:ext>
-            </a:extLst>
-          </p:cNvPr>
-          <p:cNvSpPr>
-            <a:spLocks noGrp="1"/>
-          </p:cNvSpPr>
-          <p:nvPr>
-            <p:ph sz="quarter" idx="1"/>
-          </p:nvPr>
-        </p:nvSpPr>
-        <p:spPr/>
-        <p:txBody>
-          <a:bodyPr/>
-          <a:lstStyle/>
-          <a:p>
-            <a:endParaRPr lang="en-US"/>
-          </a:p>
-        </p:txBody>
-      </p:sp>
-      <p:pic>
-        <p:nvPicPr>
-          <p:cNvPr id="6" name="Picture 5">
-            <a:extLst>
-              <a:ext uri="{FF2B5EF4-FFF2-40B4-BE49-F238E27FC236}">
-                <a16:creationId xmlns:a16="http://schemas.microsoft.com/office/drawing/2014/main" id="{25BF26C8-CCE4-4486-9554-E7D0FF8DAB8E}"/>
-              </a:ext>
-            </a:extLst>
-          </p:cNvPr>
-          <p:cNvPicPr>
-            <a:picLocks noChangeAspect="1"/>
-          </p:cNvPicPr>
-          <p:nvPr/>
-        </p:nvPicPr>
-        <p:blipFill>
-          <a:blip r:embed="rId2"/>
-          <a:stretch>
-            <a:fillRect/>
-          </a:stretch>
-        </p:blipFill>
-        <p:spPr>
-          <a:xfrm>
-            <a:off x="1857375" y="1411605"/>
-            <a:ext cx="8477250" cy="4552950"/>
-          </a:xfrm>
-          <a:prstGeom prst="rect">
-            <a:avLst/>
-          </a:prstGeom>
-          <a:ln w="12700">
-            <a:solidFill>
-              <a:schemeClr val="tx1"/>
-            </a:solidFill>
-          </a:ln>
-        </p:spPr>
-      </p:pic>
-    </p:spTree>
-    <p:extLst>
-      <p:ext uri="{BB962C8B-B14F-4D97-AF65-F5344CB8AC3E}">
-        <p14:creationId xmlns:p14="http://schemas.microsoft.com/office/powerpoint/2010/main" val="444250267"/>
-      </p:ext>
-    </p:extLst>
-  </p:cSld>
-  <p:clrMapOvr>
-    <a:masterClrMapping/>
-  </p:clrMapOvr>
 </p:sld>
 </file>
 
